--- a/doc/RedTeamLoop.pptx
+++ b/doc/RedTeamLoop.pptx
@@ -22,6 +22,10 @@
     <p:sldId id="267" r:id="rId13"/>
     <p:sldId id="268" r:id="rId14"/>
     <p:sldId id="269" r:id="rId15"/>
+    <p:sldId id="273" r:id="rId23"/>
+    <p:sldId id="274" r:id="rId24"/>
+    <p:sldId id="275" r:id="rId25"/>
+    <p:sldId id="276" r:id="rId26"/>
     <p:sldId id="270" r:id="rId16"/>
     <p:sldId id="272" r:id="rId17"/>
   </p:sldIdLst>
@@ -4225,7 +4229,7 @@
                 <a:ea typeface="Calibri" pitchFamily="34" charset="-122"/>
                 <a:cs typeface="Calibri" pitchFamily="34" charset="-120"/>
               </a:rPr>
-              <a:t>Successful attacks (score &gt;= 7.0) written to JSONL + ChromaDB vector store.</a:t>
+              <a:t>Successful attacks (score &gt;= 7.0) written to JSONL + SQLite.</a:t>
             </a:r>
             <a:endParaRPr lang="en-US" sz="1100" dirty="0"/>
           </a:p>
@@ -4303,7 +4307,7 @@
                 <a:ea typeface="Calibri" pitchFamily="34" charset="-122"/>
                 <a:cs typeface="Calibri" pitchFamily="34" charset="-120"/>
               </a:rPr>
-              <a:t>Embed the successful prompt and compare cosine similarity against all previously logged prompts. Similarity &gt; 0.92 → skip. Prevents paraphrase variants from flooding the vulnerability log.</a:t>
+              <a:t>Deduplication via SQLite unique constraint on (session_id, iteration, strategy). INSERT OR IGNORE prevents duplicate records across runs.</a:t>
             </a:r>
             <a:endParaRPr lang="en-US" sz="1050" dirty="0"/>
           </a:p>
@@ -6801,7 +6805,7 @@
                 <a:ea typeface="Consolas" pitchFamily="34" charset="-122"/>
                 <a:cs typeface="Consolas" pitchFamily="34" charset="-120"/>
               </a:rPr>
-              <a:t>chroma_{target}/</a:t>
+              <a:t/>
             </a:r>
             <a:endParaRPr lang="en-US" sz="950" dirty="0"/>
           </a:p>
@@ -7305,385 +7309,204 @@
               <a:buNone/>
             </a:pPr>
             <a:r>
-              <a:rPr lang="en-US" sz="850" dirty="0" err="1">
-                <a:solidFill>
-                  <a:srgbClr val="A5F3FC"/>
-                </a:solidFill>
-                <a:latin typeface="Consolas" pitchFamily="34" charset="0"/>
-                <a:ea typeface="Consolas" pitchFamily="34" charset="-122"/>
-                <a:cs typeface="Consolas" pitchFamily="34" charset="-120"/>
-              </a:rPr>
-              <a:t>redteamagentloop</a:t>
-            </a:r>
-            <a:r>
-              <a:rPr lang="en-US" sz="850" dirty="0">
-                <a:solidFill>
-                  <a:srgbClr val="A5F3FC"/>
-                </a:solidFill>
-                <a:latin typeface="Consolas" pitchFamily="34" charset="0"/>
-                <a:ea typeface="Consolas" pitchFamily="34" charset="-122"/>
-                <a:cs typeface="Consolas" pitchFamily="34" charset="-120"/>
-              </a:rPr>
-              <a:t>/</a:t>
+              <a:rPr sz="800">
+                <a:solidFill>
+                  <a:srgbClr val="E2E8F0"/>
+                </a:solidFill>
+              </a:rPr>
+              <a:t>redteamagentloop/</a:t>
             </a:r>
             <a:endParaRPr lang="en-US" sz="850" dirty="0"/>
           </a:p>
           <a:p>
-            <a:pPr marL="0" indent="0">
-              <a:buNone/>
-            </a:pPr>
-            <a:r>
-              <a:rPr lang="en-US" sz="850" dirty="0">
-                <a:solidFill>
-                  <a:srgbClr val="A5F3FC"/>
-                </a:solidFill>
-                <a:latin typeface="Consolas" pitchFamily="34" charset="0"/>
-                <a:ea typeface="Consolas" pitchFamily="34" charset="-122"/>
-                <a:cs typeface="Consolas" pitchFamily="34" charset="-120"/>
+            <a:r>
+              <a:rPr sz="800">
+                <a:solidFill>
+                  <a:srgbClr val="E2E8F0"/>
+                </a:solidFill>
               </a:rPr>
               <a:t>├── agent/</a:t>
             </a:r>
-            <a:endParaRPr lang="en-US" sz="850" dirty="0"/>
-          </a:p>
-          <a:p>
-            <a:pPr marL="0" indent="0">
-              <a:buNone/>
-            </a:pPr>
-            <a:r>
-              <a:rPr lang="en-US" sz="850" dirty="0">
-                <a:solidFill>
-                  <a:srgbClr val="A5F3FC"/>
-                </a:solidFill>
-                <a:latin typeface="Consolas" pitchFamily="34" charset="0"/>
-                <a:ea typeface="Consolas" pitchFamily="34" charset="-122"/>
-                <a:cs typeface="Consolas" pitchFamily="34" charset="-120"/>
-              </a:rPr>
-              <a:t>│   ├── graph.py</a:t>
-            </a:r>
-            <a:endParaRPr lang="en-US" sz="850" dirty="0"/>
-          </a:p>
-          <a:p>
-            <a:pPr marL="0" indent="0">
-              <a:buNone/>
-            </a:pPr>
-            <a:r>
-              <a:rPr lang="en-US" sz="850" dirty="0">
-                <a:solidFill>
-                  <a:srgbClr val="A5F3FC"/>
-                </a:solidFill>
-                <a:latin typeface="Consolas" pitchFamily="34" charset="0"/>
-                <a:ea typeface="Consolas" pitchFamily="34" charset="-122"/>
-                <a:cs typeface="Consolas" pitchFamily="34" charset="-120"/>
+          </a:p>
+          <a:p>
+            <a:r>
+              <a:rPr sz="800">
+                <a:solidFill>
+                  <a:srgbClr val="E2E8F0"/>
+                </a:solidFill>
               </a:rPr>
               <a:t>│   ├── state.py</a:t>
             </a:r>
-            <a:endParaRPr lang="en-US" sz="850" dirty="0"/>
-          </a:p>
-          <a:p>
-            <a:pPr marL="0" indent="0">
-              <a:buNone/>
-            </a:pPr>
-            <a:r>
-              <a:rPr lang="en-US" sz="850" dirty="0">
-                <a:solidFill>
-                  <a:srgbClr val="A5F3FC"/>
-                </a:solidFill>
-                <a:latin typeface="Consolas" pitchFamily="34" charset="0"/>
-                <a:ea typeface="Consolas" pitchFamily="34" charset="-122"/>
-                <a:cs typeface="Consolas" pitchFamily="34" charset="-120"/>
+          </a:p>
+          <a:p>
+            <a:r>
+              <a:rPr sz="800">
+                <a:solidFill>
+                  <a:srgbClr val="E2E8F0"/>
+                </a:solidFill>
               </a:rPr>
               <a:t>│   ├── nodes/</a:t>
             </a:r>
-            <a:endParaRPr lang="en-US" sz="850" dirty="0"/>
-          </a:p>
-          <a:p>
-            <a:pPr marL="0" indent="0">
-              <a:buNone/>
-            </a:pPr>
-            <a:r>
-              <a:rPr lang="en-US" sz="850" dirty="0">
-                <a:solidFill>
-                  <a:srgbClr val="A5F3FC"/>
-                </a:solidFill>
-                <a:latin typeface="Consolas" pitchFamily="34" charset="0"/>
-                <a:ea typeface="Consolas" pitchFamily="34" charset="-122"/>
-                <a:cs typeface="Consolas" pitchFamily="34" charset="-120"/>
-              </a:rPr>
-              <a:t>│   │   ├── attacker.py</a:t>
-            </a:r>
-            <a:endParaRPr lang="en-US" sz="850" dirty="0"/>
-          </a:p>
-          <a:p>
-            <a:pPr marL="0" indent="0">
-              <a:buNone/>
-            </a:pPr>
-            <a:r>
-              <a:rPr lang="en-US" sz="850" dirty="0">
-                <a:solidFill>
-                  <a:srgbClr val="A5F3FC"/>
-                </a:solidFill>
-                <a:latin typeface="Consolas" pitchFamily="34" charset="0"/>
-                <a:ea typeface="Consolas" pitchFamily="34" charset="-122"/>
-                <a:cs typeface="Consolas" pitchFamily="34" charset="-120"/>
-              </a:rPr>
-              <a:t>│   │   ├── target_caller.py</a:t>
-            </a:r>
-            <a:endParaRPr lang="en-US" sz="850" dirty="0"/>
-          </a:p>
-          <a:p>
-            <a:pPr marL="0" indent="0">
-              <a:buNone/>
-            </a:pPr>
-            <a:r>
-              <a:rPr lang="en-US" sz="850" dirty="0">
-                <a:solidFill>
-                  <a:srgbClr val="A5F3FC"/>
-                </a:solidFill>
-                <a:latin typeface="Consolas" pitchFamily="34" charset="0"/>
-                <a:ea typeface="Consolas" pitchFamily="34" charset="-122"/>
-                <a:cs typeface="Consolas" pitchFamily="34" charset="-120"/>
-              </a:rPr>
-              <a:t>│   │   ├── judge.py</a:t>
-            </a:r>
-            <a:endParaRPr lang="en-US" sz="850" dirty="0"/>
-          </a:p>
-          <a:p>
-            <a:pPr marL="0" indent="0">
-              <a:buNone/>
-            </a:pPr>
-            <a:r>
-              <a:rPr lang="en-US" sz="850" dirty="0">
-                <a:solidFill>
-                  <a:srgbClr val="A5F3FC"/>
-                </a:solidFill>
-                <a:latin typeface="Consolas" pitchFamily="34" charset="0"/>
-                <a:ea typeface="Consolas" pitchFamily="34" charset="-122"/>
-                <a:cs typeface="Consolas" pitchFamily="34" charset="-120"/>
-              </a:rPr>
-              <a:t>│   │   ├── mutation_engine.py</a:t>
-            </a:r>
-            <a:endParaRPr lang="en-US" sz="850" dirty="0"/>
-          </a:p>
-          <a:p>
-            <a:pPr marL="0" indent="0">
-              <a:buNone/>
-            </a:pPr>
-            <a:r>
-              <a:rPr lang="en-US" sz="850" dirty="0">
-                <a:solidFill>
-                  <a:srgbClr val="A5F3FC"/>
-                </a:solidFill>
-                <a:latin typeface="Consolas" pitchFamily="34" charset="0"/>
-                <a:ea typeface="Consolas" pitchFamily="34" charset="-122"/>
-                <a:cs typeface="Consolas" pitchFamily="34" charset="-120"/>
-              </a:rPr>
-              <a:t>│   │   ├── vuln_logger.py</a:t>
-            </a:r>
-            <a:endParaRPr lang="en-US" sz="850" dirty="0"/>
-          </a:p>
-          <a:p>
-            <a:pPr marL="0" indent="0">
-              <a:buNone/>
-            </a:pPr>
-            <a:r>
-              <a:rPr lang="en-US" sz="850" dirty="0">
-                <a:solidFill>
-                  <a:srgbClr val="A5F3FC"/>
-                </a:solidFill>
-                <a:latin typeface="Consolas" pitchFamily="34" charset="0"/>
-                <a:ea typeface="Consolas" pitchFamily="34" charset="-122"/>
-                <a:cs typeface="Consolas" pitchFamily="34" charset="-120"/>
+          </a:p>
+          <a:p>
+            <a:r>
+              <a:rPr sz="800">
+                <a:solidFill>
+                  <a:srgbClr val="E2E8F0"/>
+                </a:solidFill>
+              </a:rPr>
+              <a:t>│   │   ├── attacker.py  /  target_caller.py</a:t>
+            </a:r>
+          </a:p>
+          <a:p>
+            <a:r>
+              <a:rPr sz="800">
+                <a:solidFill>
+                  <a:srgbClr val="E2E8F0"/>
+                </a:solidFill>
+              </a:rPr>
+              <a:t>│   │   ├── judge.py  /  rag_judge.py  /  agent_judge.py</a:t>
+            </a:r>
+          </a:p>
+          <a:p>
+            <a:r>
+              <a:rPr sz="800">
+                <a:solidFill>
+                  <a:srgbClr val="E2E8F0"/>
+                </a:solidFill>
+              </a:rPr>
+              <a:t>│   │   ├── mutation_engine.py  /  vuln_logger.py</a:t>
+            </a:r>
+          </a:p>
+          <a:p>
+            <a:r>
+              <a:rPr sz="800">
+                <a:solidFill>
+                  <a:srgbClr val="E2E8F0"/>
+                </a:solidFill>
               </a:rPr>
               <a:t>│   │   └── loop_controller.py</a:t>
             </a:r>
-            <a:endParaRPr lang="en-US" sz="850" dirty="0"/>
-          </a:p>
-          <a:p>
-            <a:pPr marL="0" indent="0">
-              <a:buNone/>
-            </a:pPr>
-            <a:r>
-              <a:rPr lang="en-US" sz="850" dirty="0">
-                <a:solidFill>
-                  <a:srgbClr val="A5F3FC"/>
-                </a:solidFill>
-                <a:latin typeface="Consolas" pitchFamily="34" charset="0"/>
-                <a:ea typeface="Consolas" pitchFamily="34" charset="-122"/>
-                <a:cs typeface="Consolas" pitchFamily="34" charset="-120"/>
+          </a:p>
+          <a:p>
+            <a:r>
+              <a:rPr sz="800">
+                <a:solidFill>
+                  <a:srgbClr val="E2E8F0"/>
+                </a:solidFill>
+              </a:rPr>
+              <a:t>│   ├── multi_turn/</a:t>
+            </a:r>
+          </a:p>
+          <a:p>
+            <a:r>
+              <a:rPr sz="800">
+                <a:solidFill>
+                  <a:srgbClr val="E2E8F0"/>
+                </a:solidFill>
+              </a:rPr>
+              <a:t>│   │   ├── base.py  (EpisodeResult, PromptSource, single_exchange)</a:t>
+            </a:r>
+          </a:p>
+          <a:p>
+            <a:r>
+              <a:rPr sz="800">
+                <a:solidFill>
+                  <a:srgbClr val="E2E8F0"/>
+                </a:solidFill>
+              </a:rPr>
+              <a:t>│   │   ├── reactive_chain.py  /  crescendo.py  /  mcts.py</a:t>
+            </a:r>
+          </a:p>
+          <a:p>
+            <a:r>
+              <a:rPr sz="800">
+                <a:solidFill>
+                  <a:srgbClr val="E2E8F0"/>
+                </a:solidFill>
+              </a:rPr>
+              <a:t>│   │   └── prompt_sources.py</a:t>
+            </a:r>
+          </a:p>
+          <a:p>
+            <a:r>
+              <a:rPr sz="800">
+                <a:solidFill>
+                  <a:srgbClr val="E2E8F0"/>
+                </a:solidFill>
               </a:rPr>
               <a:t>│   └── strategies/</a:t>
             </a:r>
-            <a:endParaRPr lang="en-US" sz="850" dirty="0"/>
-          </a:p>
-          <a:p>
-            <a:pPr marL="0" indent="0">
-              <a:buNone/>
-            </a:pPr>
-            <a:r>
-              <a:rPr lang="en-US" sz="850" dirty="0">
-                <a:solidFill>
-                  <a:srgbClr val="A5F3FC"/>
-                </a:solidFill>
-                <a:latin typeface="Consolas" pitchFamily="34" charset="0"/>
-                <a:ea typeface="Consolas" pitchFamily="34" charset="-122"/>
-                <a:cs typeface="Consolas" pitchFamily="34" charset="-120"/>
-              </a:rPr>
-              <a:t>│       ├── base.py</a:t>
-            </a:r>
-            <a:endParaRPr lang="en-US" sz="850" dirty="0"/>
-          </a:p>
-          <a:p>
-            <a:pPr marL="0" indent="0">
-              <a:buNone/>
-            </a:pPr>
-            <a:r>
-              <a:rPr lang="en-US" sz="850" dirty="0">
-                <a:solidFill>
-                  <a:srgbClr val="A5F3FC"/>
-                </a:solidFill>
-                <a:latin typeface="Consolas" pitchFamily="34" charset="0"/>
-                <a:ea typeface="Consolas" pitchFamily="34" charset="-122"/>
-                <a:cs typeface="Consolas" pitchFamily="34" charset="-120"/>
-              </a:rPr>
-              <a:t>│       ├── jailbreak.py</a:t>
-            </a:r>
-            <a:endParaRPr lang="en-US" sz="850" dirty="0"/>
-          </a:p>
-          <a:p>
-            <a:pPr marL="0" indent="0">
-              <a:buNone/>
-            </a:pPr>
-            <a:r>
-              <a:rPr lang="en-US" sz="850" dirty="0">
-                <a:solidFill>
-                  <a:srgbClr val="A5F3FC"/>
-                </a:solidFill>
-                <a:latin typeface="Consolas" pitchFamily="34" charset="0"/>
-                <a:ea typeface="Consolas" pitchFamily="34" charset="-122"/>
-                <a:cs typeface="Consolas" pitchFamily="34" charset="-120"/>
-              </a:rPr>
-              <a:t>│       ├── injection.py</a:t>
-            </a:r>
-            <a:endParaRPr lang="en-US" sz="850" dirty="0"/>
-          </a:p>
-          <a:p>
-            <a:pPr marL="0" indent="0">
-              <a:buNone/>
-            </a:pPr>
-            <a:r>
-              <a:rPr lang="en-US" sz="850" dirty="0">
-                <a:solidFill>
-                  <a:srgbClr val="A5F3FC"/>
-                </a:solidFill>
-                <a:latin typeface="Consolas" pitchFamily="34" charset="0"/>
-                <a:ea typeface="Consolas" pitchFamily="34" charset="-122"/>
-                <a:cs typeface="Consolas" pitchFamily="34" charset="-120"/>
-              </a:rPr>
-              <a:t>│       ├── obfuscation.py</a:t>
-            </a:r>
-            <a:endParaRPr lang="en-US" sz="850" dirty="0"/>
-          </a:p>
-          <a:p>
-            <a:pPr marL="0" indent="0">
-              <a:buNone/>
-            </a:pPr>
-            <a:r>
-              <a:rPr lang="en-US" sz="850" dirty="0">
-                <a:solidFill>
-                  <a:srgbClr val="A5F3FC"/>
-                </a:solidFill>
-                <a:latin typeface="Consolas" pitchFamily="34" charset="0"/>
-                <a:ea typeface="Consolas" pitchFamily="34" charset="-122"/>
-                <a:cs typeface="Consolas" pitchFamily="34" charset="-120"/>
-              </a:rPr>
-              <a:t>│       └── finserv_specific.py</a:t>
-            </a:r>
-            <a:endParaRPr lang="en-US" sz="850" dirty="0"/>
-          </a:p>
-          <a:p>
-            <a:pPr marL="0" indent="0">
-              <a:buNone/>
-            </a:pPr>
-            <a:r>
-              <a:rPr lang="en-US" sz="850" dirty="0">
-                <a:solidFill>
-                  <a:srgbClr val="A5F3FC"/>
-                </a:solidFill>
-                <a:latin typeface="Consolas" pitchFamily="34" charset="0"/>
-                <a:ea typeface="Consolas" pitchFamily="34" charset="-122"/>
-                <a:cs typeface="Consolas" pitchFamily="34" charset="-120"/>
-              </a:rPr>
-              <a:t>├── evaluation/</a:t>
-            </a:r>
-            <a:endParaRPr lang="en-US" sz="850" dirty="0"/>
-          </a:p>
-          <a:p>
-            <a:pPr marL="0" indent="0">
-              <a:buNone/>
-            </a:pPr>
-            <a:r>
-              <a:rPr lang="en-US" sz="850" dirty="0">
-                <a:solidFill>
-                  <a:srgbClr val="A5F3FC"/>
-                </a:solidFill>
-                <a:latin typeface="Consolas" pitchFamily="34" charset="0"/>
-                <a:ea typeface="Consolas" pitchFamily="34" charset="-122"/>
-                <a:cs typeface="Consolas" pitchFamily="34" charset="-120"/>
-              </a:rPr>
-              <a:t>├── reports/</a:t>
-            </a:r>
-            <a:endParaRPr lang="en-US" sz="850" dirty="0"/>
-          </a:p>
-          <a:p>
-            <a:pPr marL="0" indent="0">
-              <a:buNone/>
-            </a:pPr>
-            <a:r>
-              <a:rPr lang="en-US" sz="850" dirty="0">
-                <a:solidFill>
-                  <a:srgbClr val="A5F3FC"/>
-                </a:solidFill>
-                <a:latin typeface="Consolas" pitchFamily="34" charset="0"/>
-                <a:ea typeface="Consolas" pitchFamily="34" charset="-122"/>
-                <a:cs typeface="Consolas" pitchFamily="34" charset="-120"/>
-              </a:rPr>
-              <a:t>├── tests/</a:t>
-            </a:r>
-            <a:endParaRPr lang="en-US" sz="850" dirty="0"/>
-          </a:p>
-          <a:p>
-            <a:pPr marL="0" indent="0">
-              <a:buNone/>
-            </a:pPr>
-            <a:r>
-              <a:rPr lang="en-US" sz="850" dirty="0">
-                <a:solidFill>
-                  <a:srgbClr val="A5F3FC"/>
-                </a:solidFill>
-                <a:latin typeface="Consolas" pitchFamily="34" charset="0"/>
-                <a:ea typeface="Consolas" pitchFamily="34" charset="-122"/>
-                <a:cs typeface="Consolas" pitchFamily="34" charset="-120"/>
-              </a:rPr>
-              <a:t>├── config.yaml</a:t>
-            </a:r>
-            <a:endParaRPr lang="en-US" sz="850" dirty="0"/>
-          </a:p>
-          <a:p>
-            <a:pPr marL="0" indent="0">
-              <a:buNone/>
-            </a:pPr>
-            <a:r>
-              <a:rPr lang="en-US" sz="850" dirty="0">
-                <a:solidFill>
-                  <a:srgbClr val="A5F3FC"/>
-                </a:solidFill>
-                <a:latin typeface="Consolas" pitchFamily="34" charset="0"/>
-                <a:ea typeface="Consolas" pitchFamily="34" charset="-122"/>
-                <a:cs typeface="Consolas" pitchFamily="34" charset="-120"/>
-              </a:rPr>
-              <a:t>└── docker-compose.yml</a:t>
-            </a:r>
-            <a:endParaRPr lang="en-US" sz="850" dirty="0"/>
+          </a:p>
+          <a:p>
+            <a:r>
+              <a:rPr sz="800">
+                <a:solidFill>
+                  <a:srgbClr val="E2E8F0"/>
+                </a:solidFill>
+              </a:rPr>
+              <a:t>│       ├── base.py  /  generic_attacks.py</a:t>
+            </a:r>
+          </a:p>
+          <a:p>
+            <a:r>
+              <a:rPr sz="800">
+                <a:solidFill>
+                  <a:srgbClr val="E2E8F0"/>
+                </a:solidFill>
+              </a:rPr>
+              <a:t>│       ├── rag_specific.py  /  agent_specific.py</a:t>
+            </a:r>
+          </a:p>
+          <a:p>
+            <a:r>
+              <a:rPr sz="800">
+                <a:solidFill>
+                  <a:srgbClr val="E2E8F0"/>
+                </a:solidFill>
+              </a:rPr>
+              <a:t>│       ├── finserv_specific.py  /  static_file.py</a:t>
+            </a:r>
+          </a:p>
+          <a:p>
+            <a:r>
+              <a:rPr sz="800">
+                <a:solidFill>
+                  <a:srgbClr val="E2E8F0"/>
+                </a:solidFill>
+              </a:rPr>
+              <a:t>├── storage/</a:t>
+            </a:r>
+          </a:p>
+          <a:p>
+            <a:r>
+              <a:rPr sz="800">
+                <a:solidFill>
+                  <a:srgbClr val="E2E8F0"/>
+                </a:solidFill>
+              </a:rPr>
+              <a:t>│   ├── manager.py  /  jsonl_store.py  /  sqlite_store.py</a:t>
+            </a:r>
+          </a:p>
+          <a:p>
+            <a:r>
+              <a:rPr sz="800">
+                <a:solidFill>
+                  <a:srgbClr val="E2E8F0"/>
+                </a:solidFill>
+              </a:rPr>
+              <a:t>├── cli.py  /  config.py  /  llm_factory.py</a:t>
+            </a:r>
+          </a:p>
+          <a:p>
+            <a:r>
+              <a:rPr sz="800">
+                <a:solidFill>
+                  <a:srgbClr val="E2E8F0"/>
+                </a:solidFill>
+              </a:rPr>
+              <a:t>└── report_generator.py</a:t>
+            </a:r>
           </a:p>
         </p:txBody>
       </p:sp>
@@ -7752,7 +7575,7 @@
                 <a:ea typeface="Consolas" pitchFamily="34" charset="-122"/>
                 <a:cs typeface="Consolas" pitchFamily="34" charset="-120"/>
               </a:rPr>
-              <a:t>graph.py</a:t>
+              <a:t>cli.py</a:t>
             </a:r>
             <a:endParaRPr lang="en-US" sz="950" dirty="0"/>
           </a:p>
@@ -7791,7 +7614,7 @@
                 <a:ea typeface="Calibri" pitchFamily="34" charset="-122"/>
                 <a:cs typeface="Calibri" pitchFamily="34" charset="-120"/>
               </a:rPr>
-              <a:t>LangGraph StateGraph — wires all nodes and routing logic</a:t>
+              <a:t>Plain async loop — dispatches to single-turn or multi-turn path</a:t>
             </a:r>
             <a:endParaRPr lang="en-US" sz="900" dirty="0"/>
           </a:p>
@@ -8121,7 +7944,7 @@
                 <a:ea typeface="Calibri" pitchFamily="34" charset="-122"/>
                 <a:cs typeface="Calibri" pitchFamily="34" charset="-120"/>
               </a:rPr>
-              <a:t>10 attack strategies behind a common base class</a:t>
+              <a:t>59 strategies: generic / rag_specific / agent_specific / finserv / static_file</a:t>
             </a:r>
             <a:endParaRPr lang="en-US" sz="900" dirty="0"/>
           </a:p>
@@ -11430,6 +11253,3200 @@
 </p:sld>
 </file>
 
+<file path=ppt/slides/slide17.xml><?xml version="1.0" encoding="utf-8"?>
+<p:sld xmlns:a="http://schemas.openxmlformats.org/drawingml/2006/main" xmlns:p="http://schemas.openxmlformats.org/presentationml/2006/main" xmlns:r="http://schemas.openxmlformats.org/officeDocument/2006/relationships">
+  <p:cSld>
+    <p:spTree>
+      <p:nvGrpSpPr>
+        <p:cNvPr id="1" name=""/>
+        <p:cNvGrpSpPr/>
+        <p:nvPr/>
+      </p:nvGrpSpPr>
+      <p:grpSpPr/>
+      <p:sp>
+        <p:nvSpPr>
+          <p:cNvPr id="2" name="Rectangle 1"/>
+          <p:cNvSpPr/>
+          <p:nvPr/>
+        </p:nvSpPr>
+        <p:spPr>
+          <a:xfrm>
+            <a:off x="0" y="0"/>
+            <a:ext cx="9144000" cy="54864"/>
+          </a:xfrm>
+          <a:prstGeom prst="rect">
+            <a:avLst/>
+          </a:prstGeom>
+          <a:solidFill>
+            <a:srgbClr val="00D4FF"/>
+          </a:solidFill>
+          <a:ln>
+            <a:noFill/>
+          </a:ln>
+        </p:spPr>
+        <p:style>
+          <a:lnRef idx="1">
+            <a:schemeClr val="accent1"/>
+          </a:lnRef>
+          <a:fillRef idx="3">
+            <a:schemeClr val="accent1"/>
+          </a:fillRef>
+          <a:effectRef idx="2">
+            <a:schemeClr val="accent1"/>
+          </a:effectRef>
+          <a:fontRef idx="minor">
+            <a:schemeClr val="lt1"/>
+          </a:fontRef>
+        </p:style>
+        <p:txBody>
+          <a:bodyPr rtlCol="0" anchor="ctr"/>
+          <a:lstStyle/>
+          <a:p>
+            <a:pPr algn="ctr"/>
+          </a:p>
+        </p:txBody>
+      </p:sp>
+      <p:sp>
+        <p:nvSpPr>
+          <p:cNvPr id="3" name="TextBox 2"/>
+          <p:cNvSpPr txBox="1"/>
+          <p:nvPr/>
+        </p:nvSpPr>
+        <p:spPr>
+          <a:xfrm>
+            <a:off x="320040" y="109728"/>
+            <a:ext cx="8503920" cy="274320"/>
+          </a:xfrm>
+          <a:prstGeom prst="rect">
+            <a:avLst/>
+          </a:prstGeom>
+          <a:noFill/>
+        </p:spPr>
+        <p:txBody>
+          <a:bodyPr wrap="square">
+            <a:spAutoFit/>
+          </a:bodyPr>
+          <a:lstStyle/>
+          <a:p>
+            <a:pPr algn="l"/>
+            <a:r>
+              <a:rPr sz="900" b="1" i="0">
+                <a:solidFill>
+                  <a:srgbClr val="00D4FF"/>
+                </a:solidFill>
+              </a:rPr>
+              <a:t>MULTI-TURN</a:t>
+            </a:r>
+          </a:p>
+        </p:txBody>
+      </p:sp>
+      <p:sp>
+        <p:nvSpPr>
+          <p:cNvPr id="4" name="TextBox 3"/>
+          <p:cNvSpPr txBox="1"/>
+          <p:nvPr/>
+        </p:nvSpPr>
+        <p:spPr>
+          <a:xfrm>
+            <a:off x="320040" y="475488"/>
+            <a:ext cx="8503920" cy="594360"/>
+          </a:xfrm>
+          <a:prstGeom prst="rect">
+            <a:avLst/>
+          </a:prstGeom>
+          <a:noFill/>
+        </p:spPr>
+        <p:txBody>
+          <a:bodyPr wrap="square">
+            <a:spAutoFit/>
+          </a:bodyPr>
+          <a:lstStyle/>
+          <a:p>
+            <a:pPr algn="l"/>
+            <a:r>
+              <a:rPr sz="2800" b="1" i="0">
+                <a:solidFill>
+                  <a:srgbClr val="FFFFFF"/>
+                </a:solidFill>
+              </a:rPr>
+              <a:t>Multi-Turn Attack Modes</a:t>
+            </a:r>
+          </a:p>
+        </p:txBody>
+      </p:sp>
+      <p:sp>
+        <p:nvSpPr>
+          <p:cNvPr id="5" name="TextBox 4"/>
+          <p:cNvSpPr txBox="1"/>
+          <p:nvPr/>
+        </p:nvSpPr>
+        <p:spPr>
+          <a:xfrm>
+            <a:off x="320040" y="1051560"/>
+            <a:ext cx="8503920" cy="274320"/>
+          </a:xfrm>
+          <a:prstGeom prst="rect">
+            <a:avLst/>
+          </a:prstGeom>
+          <a:noFill/>
+        </p:spPr>
+        <p:txBody>
+          <a:bodyPr wrap="square">
+            <a:spAutoFit/>
+          </a:bodyPr>
+          <a:lstStyle/>
+          <a:p>
+            <a:pPr algn="l"/>
+            <a:r>
+              <a:rPr sz="1200" b="0" i="0">
+                <a:solidFill>
+                  <a:srgbClr val="94A3B8"/>
+                </a:solidFill>
+              </a:rPr>
+              <a:t>Four execution modes controlled by --multi-turn-mode flag</a:t>
+            </a:r>
+          </a:p>
+        </p:txBody>
+      </p:sp>
+      <p:sp>
+        <p:nvSpPr>
+          <p:cNvPr id="6" name="Rectangle 5"/>
+          <p:cNvSpPr/>
+          <p:nvPr/>
+        </p:nvSpPr>
+        <p:spPr>
+          <a:xfrm>
+            <a:off x="320040" y="1389888"/>
+            <a:ext cx="8503920" cy="13716"/>
+          </a:xfrm>
+          <a:prstGeom prst="rect">
+            <a:avLst/>
+          </a:prstGeom>
+          <a:solidFill>
+            <a:srgbClr val="00D4FF"/>
+          </a:solidFill>
+          <a:ln>
+            <a:noFill/>
+          </a:ln>
+        </p:spPr>
+        <p:style>
+          <a:lnRef idx="1">
+            <a:schemeClr val="accent1"/>
+          </a:lnRef>
+          <a:fillRef idx="3">
+            <a:schemeClr val="accent1"/>
+          </a:fillRef>
+          <a:effectRef idx="2">
+            <a:schemeClr val="accent1"/>
+          </a:effectRef>
+          <a:fontRef idx="minor">
+            <a:schemeClr val="lt1"/>
+          </a:fontRef>
+        </p:style>
+        <p:txBody>
+          <a:bodyPr rtlCol="0" anchor="ctr"/>
+          <a:lstStyle/>
+          <a:p>
+            <a:pPr algn="ctr"/>
+          </a:p>
+        </p:txBody>
+      </p:sp>
+      <p:sp>
+        <p:nvSpPr>
+          <p:cNvPr id="7" name="Rectangle 6"/>
+          <p:cNvSpPr/>
+          <p:nvPr/>
+        </p:nvSpPr>
+        <p:spPr>
+          <a:xfrm>
+            <a:off x="0" y="4892040"/>
+            <a:ext cx="9144000" cy="251460"/>
+          </a:xfrm>
+          <a:prstGeom prst="rect">
+            <a:avLst/>
+          </a:prstGeom>
+          <a:solidFill>
+            <a:srgbClr val="0F172A"/>
+          </a:solidFill>
+          <a:ln>
+            <a:noFill/>
+          </a:ln>
+        </p:spPr>
+        <p:style>
+          <a:lnRef idx="1">
+            <a:schemeClr val="accent1"/>
+          </a:lnRef>
+          <a:fillRef idx="3">
+            <a:schemeClr val="accent1"/>
+          </a:fillRef>
+          <a:effectRef idx="2">
+            <a:schemeClr val="accent1"/>
+          </a:effectRef>
+          <a:fontRef idx="minor">
+            <a:schemeClr val="lt1"/>
+          </a:fontRef>
+        </p:style>
+        <p:txBody>
+          <a:bodyPr rtlCol="0" anchor="ctr"/>
+          <a:lstStyle/>
+          <a:p>
+            <a:pPr algn="ctr"/>
+          </a:p>
+        </p:txBody>
+      </p:sp>
+      <p:sp>
+        <p:nvSpPr>
+          <p:cNvPr id="8" name="TextBox 7"/>
+          <p:cNvSpPr txBox="1"/>
+          <p:nvPr/>
+        </p:nvSpPr>
+        <p:spPr>
+          <a:xfrm>
+            <a:off x="320040" y="4892040"/>
+            <a:ext cx="8503920" cy="251460"/>
+          </a:xfrm>
+          <a:prstGeom prst="rect">
+            <a:avLst/>
+          </a:prstGeom>
+          <a:noFill/>
+        </p:spPr>
+        <p:txBody>
+          <a:bodyPr wrap="square">
+            <a:spAutoFit/>
+          </a:bodyPr>
+          <a:lstStyle/>
+          <a:p>
+            <a:pPr algn="l"/>
+            <a:r>
+              <a:rPr sz="800" b="0" i="0">
+                <a:solidFill>
+                  <a:srgbClr val="94A3B8"/>
+                </a:solidFill>
+              </a:rPr>
+              <a:t>RedTeamLoop  |  Automated LLM Safety Auditing</a:t>
+            </a:r>
+          </a:p>
+        </p:txBody>
+      </p:sp>
+      <p:sp>
+        <p:nvSpPr>
+          <p:cNvPr id="9" name="Rectangle 8"/>
+          <p:cNvSpPr/>
+          <p:nvPr/>
+        </p:nvSpPr>
+        <p:spPr>
+          <a:xfrm>
+            <a:off x="270000" y="1650000"/>
+            <a:ext cx="2000000" cy="2700000"/>
+          </a:xfrm>
+          <a:prstGeom prst="rect">
+            <a:avLst/>
+          </a:prstGeom>
+          <a:solidFill>
+            <a:srgbClr val="1E293B"/>
+          </a:solidFill>
+          <a:ln w="12700">
+            <a:solidFill>
+              <a:srgbClr val="FFFFFF"/>
+            </a:solidFill>
+          </a:ln>
+        </p:spPr>
+        <p:style>
+          <a:lnRef idx="1">
+            <a:schemeClr val="accent1"/>
+          </a:lnRef>
+          <a:fillRef idx="3">
+            <a:schemeClr val="accent1"/>
+          </a:fillRef>
+          <a:effectRef idx="2">
+            <a:schemeClr val="accent1"/>
+          </a:effectRef>
+          <a:fontRef idx="minor">
+            <a:schemeClr val="lt1"/>
+          </a:fontRef>
+        </p:style>
+        <p:txBody>
+          <a:bodyPr rtlCol="0" anchor="ctr"/>
+          <a:lstStyle/>
+          <a:p>
+            <a:pPr algn="ctr"/>
+          </a:p>
+        </p:txBody>
+      </p:sp>
+      <p:sp>
+        <p:nvSpPr>
+          <p:cNvPr id="10" name="TextBox 9"/>
+          <p:cNvSpPr txBox="1"/>
+          <p:nvPr/>
+        </p:nvSpPr>
+        <p:spPr>
+          <a:xfrm>
+            <a:off x="320000" y="1730000"/>
+            <a:ext cx="1900000" cy="420000"/>
+          </a:xfrm>
+          <a:prstGeom prst="rect">
+            <a:avLst/>
+          </a:prstGeom>
+          <a:noFill/>
+        </p:spPr>
+        <p:txBody>
+          <a:bodyPr wrap="square">
+            <a:spAutoFit/>
+          </a:bodyPr>
+          <a:lstStyle/>
+          <a:p>
+            <a:pPr algn="ctr"/>
+            <a:r>
+              <a:rPr sz="1100" b="1" i="0">
+                <a:solidFill>
+                  <a:srgbClr val="FFFFFF"/>
+                </a:solidFill>
+              </a:rPr>
+              <a:t>single_turn
+(default)</a:t>
+            </a:r>
+          </a:p>
+        </p:txBody>
+      </p:sp>
+      <p:sp>
+        <p:nvSpPr>
+          <p:cNvPr id="11" name="TextBox 10"/>
+          <p:cNvSpPr txBox="1"/>
+          <p:nvPr/>
+        </p:nvSpPr>
+        <p:spPr>
+          <a:xfrm>
+            <a:off x="320000" y="2170000"/>
+            <a:ext cx="1900000" cy="2100000"/>
+          </a:xfrm>
+          <a:prstGeom prst="rect">
+            <a:avLst/>
+          </a:prstGeom>
+          <a:noFill/>
+        </p:spPr>
+        <p:txBody>
+          <a:bodyPr wrap="square">
+            <a:spAutoFit/>
+          </a:bodyPr>
+          <a:lstStyle/>
+          <a:p>
+            <a:pPr algn="l"/>
+            <a:r>
+              <a:rPr sz="900" b="0" i="0">
+                <a:solidFill>
+                  <a:srgbClr val="E2E8F0"/>
+                </a:solidFill>
+              </a:rPr>
+              <a:t>Classic iterative loop.
+Attacker → Target → Judge
+→ Mutation Engine.
+No conversation history.
+Config: loop.max_iterations</a:t>
+            </a:r>
+          </a:p>
+        </p:txBody>
+      </p:sp>
+      <p:sp>
+        <p:nvSpPr>
+          <p:cNvPr id="12" name="Rectangle 11"/>
+          <p:cNvSpPr/>
+          <p:nvPr/>
+        </p:nvSpPr>
+        <p:spPr>
+          <a:xfrm>
+            <a:off x="2370000" y="1650000"/>
+            <a:ext cx="2000000" cy="2700000"/>
+          </a:xfrm>
+          <a:prstGeom prst="rect">
+            <a:avLst/>
+          </a:prstGeom>
+          <a:solidFill>
+            <a:srgbClr val="1E293B"/>
+          </a:solidFill>
+          <a:ln w="12700">
+            <a:solidFill>
+              <a:srgbClr val="00D4FF"/>
+            </a:solidFill>
+          </a:ln>
+        </p:spPr>
+        <p:style>
+          <a:lnRef idx="1">
+            <a:schemeClr val="accent1"/>
+          </a:lnRef>
+          <a:fillRef idx="3">
+            <a:schemeClr val="accent1"/>
+          </a:fillRef>
+          <a:effectRef idx="2">
+            <a:schemeClr val="accent1"/>
+          </a:effectRef>
+          <a:fontRef idx="minor">
+            <a:schemeClr val="lt1"/>
+          </a:fontRef>
+        </p:style>
+        <p:txBody>
+          <a:bodyPr rtlCol="0" anchor="ctr"/>
+          <a:lstStyle/>
+          <a:p>
+            <a:pPr algn="ctr"/>
+          </a:p>
+        </p:txBody>
+      </p:sp>
+      <p:sp>
+        <p:nvSpPr>
+          <p:cNvPr id="13" name="TextBox 12"/>
+          <p:cNvSpPr txBox="1"/>
+          <p:nvPr/>
+        </p:nvSpPr>
+        <p:spPr>
+          <a:xfrm>
+            <a:off x="2420000" y="1730000"/>
+            <a:ext cx="1900000" cy="420000"/>
+          </a:xfrm>
+          <a:prstGeom prst="rect">
+            <a:avLst/>
+          </a:prstGeom>
+          <a:noFill/>
+        </p:spPr>
+        <p:txBody>
+          <a:bodyPr wrap="square">
+            <a:spAutoFit/>
+          </a:bodyPr>
+          <a:lstStyle/>
+          <a:p>
+            <a:pPr algn="ctr"/>
+            <a:r>
+              <a:rPr sz="1100" b="1" i="0">
+                <a:solidFill>
+                  <a:srgbClr val="00D4FF"/>
+                </a:solidFill>
+              </a:rPr>
+              <a:t>reactive_chain</a:t>
+            </a:r>
+          </a:p>
+        </p:txBody>
+      </p:sp>
+      <p:sp>
+        <p:nvSpPr>
+          <p:cNvPr id="14" name="TextBox 13"/>
+          <p:cNvSpPr txBox="1"/>
+          <p:nvPr/>
+        </p:nvSpPr>
+        <p:spPr>
+          <a:xfrm>
+            <a:off x="2420000" y="2170000"/>
+            <a:ext cx="1900000" cy="2100000"/>
+          </a:xfrm>
+          <a:prstGeom prst="rect">
+            <a:avLst/>
+          </a:prstGeom>
+          <a:noFill/>
+        </p:spPr>
+        <p:txBody>
+          <a:bodyPr wrap="square">
+            <a:spAutoFit/>
+          </a:bodyPr>
+          <a:lstStyle/>
+          <a:p>
+            <a:pPr algn="l"/>
+            <a:r>
+              <a:rPr sz="900" b="0" i="0">
+                <a:solidFill>
+                  <a:srgbClr val="E2E8F0"/>
+                </a:solidFill>
+              </a:rPr>
+              <a:t>Linear multi-turn.
+Each prompt informed by
+judge score + prior reply.
+Prompt source: static JSONL
+or live attacker LLM.</a:t>
+            </a:r>
+          </a:p>
+        </p:txBody>
+      </p:sp>
+      <p:sp>
+        <p:nvSpPr>
+          <p:cNvPr id="15" name="Rectangle 14"/>
+          <p:cNvSpPr/>
+          <p:nvPr/>
+        </p:nvSpPr>
+        <p:spPr>
+          <a:xfrm>
+            <a:off x="4470000" y="1650000"/>
+            <a:ext cx="2000000" cy="2700000"/>
+          </a:xfrm>
+          <a:prstGeom prst="rect">
+            <a:avLst/>
+          </a:prstGeom>
+          <a:solidFill>
+            <a:srgbClr val="1E293B"/>
+          </a:solidFill>
+          <a:ln w="12700">
+            <a:solidFill>
+              <a:srgbClr val="F59E0B"/>
+            </a:solidFill>
+          </a:ln>
+        </p:spPr>
+        <p:style>
+          <a:lnRef idx="1">
+            <a:schemeClr val="accent1"/>
+          </a:lnRef>
+          <a:fillRef idx="3">
+            <a:schemeClr val="accent1"/>
+          </a:fillRef>
+          <a:effectRef idx="2">
+            <a:schemeClr val="accent1"/>
+          </a:effectRef>
+          <a:fontRef idx="minor">
+            <a:schemeClr val="lt1"/>
+          </a:fontRef>
+        </p:style>
+        <p:txBody>
+          <a:bodyPr rtlCol="0" anchor="ctr"/>
+          <a:lstStyle/>
+          <a:p>
+            <a:pPr algn="ctr"/>
+          </a:p>
+        </p:txBody>
+      </p:sp>
+      <p:sp>
+        <p:nvSpPr>
+          <p:cNvPr id="16" name="TextBox 15"/>
+          <p:cNvSpPr txBox="1"/>
+          <p:nvPr/>
+        </p:nvSpPr>
+        <p:spPr>
+          <a:xfrm>
+            <a:off x="4520000" y="1730000"/>
+            <a:ext cx="1900000" cy="420000"/>
+          </a:xfrm>
+          <a:prstGeom prst="rect">
+            <a:avLst/>
+          </a:prstGeom>
+          <a:noFill/>
+        </p:spPr>
+        <p:txBody>
+          <a:bodyPr wrap="square">
+            <a:spAutoFit/>
+          </a:bodyPr>
+          <a:lstStyle/>
+          <a:p>
+            <a:pPr algn="ctr"/>
+            <a:r>
+              <a:rPr sz="1100" b="1" i="0">
+                <a:solidFill>
+                  <a:srgbClr val="F59E0B"/>
+                </a:solidFill>
+              </a:rPr>
+              <a:t>crescendo</a:t>
+            </a:r>
+          </a:p>
+        </p:txBody>
+      </p:sp>
+      <p:sp>
+        <p:nvSpPr>
+          <p:cNvPr id="17" name="TextBox 16"/>
+          <p:cNvSpPr txBox="1"/>
+          <p:nvPr/>
+        </p:nvSpPr>
+        <p:spPr>
+          <a:xfrm>
+            <a:off x="4520000" y="2170000"/>
+            <a:ext cx="1900000" cy="2100000"/>
+          </a:xfrm>
+          <a:prstGeom prst="rect">
+            <a:avLst/>
+          </a:prstGeom>
+          <a:noFill/>
+        </p:spPr>
+        <p:txBody>
+          <a:bodyPr wrap="square">
+            <a:spAutoFit/>
+          </a:bodyPr>
+          <a:lstStyle/>
+          <a:p>
+            <a:pPr algn="l"/>
+            <a:r>
+              <a:rPr sz="900" b="0" i="0">
+                <a:solidFill>
+                  <a:srgbClr val="E2E8F0"/>
+                </a:solidFill>
+              </a:rPr>
+              <a:t>Pre-scripted escalation.
+Starts innocuous, escalates
+gradually across turns.
+Script: JSONL file
+or LLM-generated upfront.</a:t>
+            </a:r>
+          </a:p>
+        </p:txBody>
+      </p:sp>
+      <p:sp>
+        <p:nvSpPr>
+          <p:cNvPr id="18" name="Rectangle 17"/>
+          <p:cNvSpPr/>
+          <p:nvPr/>
+        </p:nvSpPr>
+        <p:spPr>
+          <a:xfrm>
+            <a:off x="6570000" y="1650000"/>
+            <a:ext cx="2000000" cy="2700000"/>
+          </a:xfrm>
+          <a:prstGeom prst="rect">
+            <a:avLst/>
+          </a:prstGeom>
+          <a:solidFill>
+            <a:srgbClr val="1E293B"/>
+          </a:solidFill>
+          <a:ln w="12700">
+            <a:solidFill>
+              <a:srgbClr val="22C55E"/>
+            </a:solidFill>
+          </a:ln>
+        </p:spPr>
+        <p:style>
+          <a:lnRef idx="1">
+            <a:schemeClr val="accent1"/>
+          </a:lnRef>
+          <a:fillRef idx="3">
+            <a:schemeClr val="accent1"/>
+          </a:fillRef>
+          <a:effectRef idx="2">
+            <a:schemeClr val="accent1"/>
+          </a:effectRef>
+          <a:fontRef idx="minor">
+            <a:schemeClr val="lt1"/>
+          </a:fontRef>
+        </p:style>
+        <p:txBody>
+          <a:bodyPr rtlCol="0" anchor="ctr"/>
+          <a:lstStyle/>
+          <a:p>
+            <a:pPr algn="ctr"/>
+          </a:p>
+        </p:txBody>
+      </p:sp>
+      <p:sp>
+        <p:nvSpPr>
+          <p:cNvPr id="19" name="TextBox 18"/>
+          <p:cNvSpPr txBox="1"/>
+          <p:nvPr/>
+        </p:nvSpPr>
+        <p:spPr>
+          <a:xfrm>
+            <a:off x="6620000" y="1730000"/>
+            <a:ext cx="1900000" cy="420000"/>
+          </a:xfrm>
+          <a:prstGeom prst="rect">
+            <a:avLst/>
+          </a:prstGeom>
+          <a:noFill/>
+        </p:spPr>
+        <p:txBody>
+          <a:bodyPr wrap="square">
+            <a:spAutoFit/>
+          </a:bodyPr>
+          <a:lstStyle/>
+          <a:p>
+            <a:pPr algn="ctr"/>
+            <a:r>
+              <a:rPr sz="1100" b="1" i="0">
+                <a:solidFill>
+                  <a:srgbClr val="22C55E"/>
+                </a:solidFill>
+              </a:rPr>
+              <a:t>mcts</a:t>
+            </a:r>
+          </a:p>
+        </p:txBody>
+      </p:sp>
+      <p:sp>
+        <p:nvSpPr>
+          <p:cNvPr id="20" name="TextBox 19"/>
+          <p:cNvSpPr txBox="1"/>
+          <p:nvPr/>
+        </p:nvSpPr>
+        <p:spPr>
+          <a:xfrm>
+            <a:off x="6620000" y="2170000"/>
+            <a:ext cx="1900000" cy="2100000"/>
+          </a:xfrm>
+          <a:prstGeom prst="rect">
+            <a:avLst/>
+          </a:prstGeom>
+          <a:noFill/>
+        </p:spPr>
+        <p:txBody>
+          <a:bodyPr wrap="square">
+            <a:spAutoFit/>
+          </a:bodyPr>
+          <a:lstStyle/>
+          <a:p>
+            <a:pPr algn="l"/>
+            <a:r>
+              <a:rPr sz="900" b="0" i="0">
+                <a:solidFill>
+                  <a:srgbClr val="E2E8F0"/>
+                </a:solidFill>
+              </a:rPr>
+              <a:t>Monte Carlo Tree Search.
+Explores branching conversation
+trees.
+SELECT → EXPAND →
+SIMULATE → BACKPROP.</a:t>
+            </a:r>
+          </a:p>
+        </p:txBody>
+      </p:sp>
+      <p:sp>
+        <p:nvSpPr>
+          <p:cNvPr id="21" name="TextBox 20"/>
+          <p:cNvSpPr txBox="1"/>
+          <p:nvPr/>
+        </p:nvSpPr>
+        <p:spPr>
+          <a:xfrm>
+            <a:off x="270000" y="4480000"/>
+            <a:ext cx="8604000" cy="360000"/>
+          </a:xfrm>
+          <a:prstGeom prst="rect">
+            <a:avLst/>
+          </a:prstGeom>
+          <a:noFill/>
+        </p:spPr>
+        <p:txBody>
+          <a:bodyPr wrap="square">
+            <a:spAutoFit/>
+          </a:bodyPr>
+          <a:lstStyle/>
+          <a:p>
+            <a:pPr algn="l"/>
+            <a:r>
+              <a:rPr sz="900" b="0" i="1">
+                <a:solidFill>
+                  <a:srgbClr val="94A3B8"/>
+                </a:solidFill>
+              </a:rPr>
+              <a:t>All modes share: LLMs (attacker / target / judge), config.yaml, and output artifacts.  Prompt source = static JSONL (--prompt-file) or live attacker LLM.</a:t>
+            </a:r>
+          </a:p>
+        </p:txBody>
+      </p:sp>
+    </p:spTree>
+  </p:cSld>
+  <p:clrMapOvr>
+    <a:masterClrMapping/>
+  </p:clrMapOvr>
+</p:sld>
+</file>
+
+<file path=ppt/slides/slide18.xml><?xml version="1.0" encoding="utf-8"?>
+<p:sld xmlns:a="http://schemas.openxmlformats.org/drawingml/2006/main" xmlns:p="http://schemas.openxmlformats.org/presentationml/2006/main" xmlns:r="http://schemas.openxmlformats.org/officeDocument/2006/relationships">
+  <p:cSld>
+    <p:spTree>
+      <p:nvGrpSpPr>
+        <p:cNvPr id="1" name=""/>
+        <p:cNvGrpSpPr/>
+        <p:nvPr/>
+      </p:nvGrpSpPr>
+      <p:grpSpPr/>
+      <p:sp>
+        <p:nvSpPr>
+          <p:cNvPr id="2" name="Rectangle 1"/>
+          <p:cNvSpPr/>
+          <p:nvPr/>
+        </p:nvSpPr>
+        <p:spPr>
+          <a:xfrm>
+            <a:off x="0" y="0"/>
+            <a:ext cx="9144000" cy="54864"/>
+          </a:xfrm>
+          <a:prstGeom prst="rect">
+            <a:avLst/>
+          </a:prstGeom>
+          <a:solidFill>
+            <a:srgbClr val="00D4FF"/>
+          </a:solidFill>
+          <a:ln>
+            <a:noFill/>
+          </a:ln>
+        </p:spPr>
+        <p:style>
+          <a:lnRef idx="1">
+            <a:schemeClr val="accent1"/>
+          </a:lnRef>
+          <a:fillRef idx="3">
+            <a:schemeClr val="accent1"/>
+          </a:fillRef>
+          <a:effectRef idx="2">
+            <a:schemeClr val="accent1"/>
+          </a:effectRef>
+          <a:fontRef idx="minor">
+            <a:schemeClr val="lt1"/>
+          </a:fontRef>
+        </p:style>
+        <p:txBody>
+          <a:bodyPr rtlCol="0" anchor="ctr"/>
+          <a:lstStyle/>
+          <a:p>
+            <a:pPr algn="ctr"/>
+          </a:p>
+        </p:txBody>
+      </p:sp>
+      <p:sp>
+        <p:nvSpPr>
+          <p:cNvPr id="3" name="TextBox 2"/>
+          <p:cNvSpPr txBox="1"/>
+          <p:nvPr/>
+        </p:nvSpPr>
+        <p:spPr>
+          <a:xfrm>
+            <a:off x="320040" y="109728"/>
+            <a:ext cx="8503920" cy="274320"/>
+          </a:xfrm>
+          <a:prstGeom prst="rect">
+            <a:avLst/>
+          </a:prstGeom>
+          <a:noFill/>
+        </p:spPr>
+        <p:txBody>
+          <a:bodyPr wrap="square">
+            <a:spAutoFit/>
+          </a:bodyPr>
+          <a:lstStyle/>
+          <a:p>
+            <a:pPr algn="l"/>
+            <a:r>
+              <a:rPr sz="900" b="1" i="0">
+                <a:solidFill>
+                  <a:srgbClr val="00D4FF"/>
+                </a:solidFill>
+              </a:rPr>
+              <a:t>MULTI-TURN &gt; ARCHITECTURE</a:t>
+            </a:r>
+          </a:p>
+        </p:txBody>
+      </p:sp>
+      <p:sp>
+        <p:nvSpPr>
+          <p:cNvPr id="4" name="TextBox 3"/>
+          <p:cNvSpPr txBox="1"/>
+          <p:nvPr/>
+        </p:nvSpPr>
+        <p:spPr>
+          <a:xfrm>
+            <a:off x="320040" y="475488"/>
+            <a:ext cx="8503920" cy="594360"/>
+          </a:xfrm>
+          <a:prstGeom prst="rect">
+            <a:avLst/>
+          </a:prstGeom>
+          <a:noFill/>
+        </p:spPr>
+        <p:txBody>
+          <a:bodyPr wrap="square">
+            <a:spAutoFit/>
+          </a:bodyPr>
+          <a:lstStyle/>
+          <a:p>
+            <a:pPr algn="l"/>
+            <a:r>
+              <a:rPr sz="2800" b="1" i="0">
+                <a:solidFill>
+                  <a:srgbClr val="FFFFFF"/>
+                </a:solidFill>
+              </a:rPr>
+              <a:t>Shared Episode / Exchange Structure</a:t>
+            </a:r>
+          </a:p>
+        </p:txBody>
+      </p:sp>
+      <p:sp>
+        <p:nvSpPr>
+          <p:cNvPr id="5" name="TextBox 4"/>
+          <p:cNvSpPr txBox="1"/>
+          <p:nvPr/>
+        </p:nvSpPr>
+        <p:spPr>
+          <a:xfrm>
+            <a:off x="320040" y="1051560"/>
+            <a:ext cx="8503920" cy="274320"/>
+          </a:xfrm>
+          <a:prstGeom prst="rect">
+            <a:avLst/>
+          </a:prstGeom>
+          <a:noFill/>
+        </p:spPr>
+        <p:txBody>
+          <a:bodyPr wrap="square">
+            <a:spAutoFit/>
+          </a:bodyPr>
+          <a:lstStyle/>
+          <a:p>
+            <a:pPr algn="l"/>
+            <a:r>
+              <a:rPr sz="1200" b="0" i="0">
+                <a:solidFill>
+                  <a:srgbClr val="94A3B8"/>
+                </a:solidFill>
+              </a:rPr>
+              <a:t>Common orchestration skeleton used by all three multi-turn modes</a:t>
+            </a:r>
+          </a:p>
+        </p:txBody>
+      </p:sp>
+      <p:sp>
+        <p:nvSpPr>
+          <p:cNvPr id="6" name="Rectangle 5"/>
+          <p:cNvSpPr/>
+          <p:nvPr/>
+        </p:nvSpPr>
+        <p:spPr>
+          <a:xfrm>
+            <a:off x="320040" y="1389888"/>
+            <a:ext cx="8503920" cy="13716"/>
+          </a:xfrm>
+          <a:prstGeom prst="rect">
+            <a:avLst/>
+          </a:prstGeom>
+          <a:solidFill>
+            <a:srgbClr val="00D4FF"/>
+          </a:solidFill>
+          <a:ln>
+            <a:noFill/>
+          </a:ln>
+        </p:spPr>
+        <p:style>
+          <a:lnRef idx="1">
+            <a:schemeClr val="accent1"/>
+          </a:lnRef>
+          <a:fillRef idx="3">
+            <a:schemeClr val="accent1"/>
+          </a:fillRef>
+          <a:effectRef idx="2">
+            <a:schemeClr val="accent1"/>
+          </a:effectRef>
+          <a:fontRef idx="minor">
+            <a:schemeClr val="lt1"/>
+          </a:fontRef>
+        </p:style>
+        <p:txBody>
+          <a:bodyPr rtlCol="0" anchor="ctr"/>
+          <a:lstStyle/>
+          <a:p>
+            <a:pPr algn="ctr"/>
+          </a:p>
+        </p:txBody>
+      </p:sp>
+      <p:sp>
+        <p:nvSpPr>
+          <p:cNvPr id="7" name="Rectangle 6"/>
+          <p:cNvSpPr/>
+          <p:nvPr/>
+        </p:nvSpPr>
+        <p:spPr>
+          <a:xfrm>
+            <a:off x="0" y="4892040"/>
+            <a:ext cx="9144000" cy="251460"/>
+          </a:xfrm>
+          <a:prstGeom prst="rect">
+            <a:avLst/>
+          </a:prstGeom>
+          <a:solidFill>
+            <a:srgbClr val="0F172A"/>
+          </a:solidFill>
+          <a:ln>
+            <a:noFill/>
+          </a:ln>
+        </p:spPr>
+        <p:style>
+          <a:lnRef idx="1">
+            <a:schemeClr val="accent1"/>
+          </a:lnRef>
+          <a:fillRef idx="3">
+            <a:schemeClr val="accent1"/>
+          </a:fillRef>
+          <a:effectRef idx="2">
+            <a:schemeClr val="accent1"/>
+          </a:effectRef>
+          <a:fontRef idx="minor">
+            <a:schemeClr val="lt1"/>
+          </a:fontRef>
+        </p:style>
+        <p:txBody>
+          <a:bodyPr rtlCol="0" anchor="ctr"/>
+          <a:lstStyle/>
+          <a:p>
+            <a:pPr algn="ctr"/>
+          </a:p>
+        </p:txBody>
+      </p:sp>
+      <p:sp>
+        <p:nvSpPr>
+          <p:cNvPr id="8" name="TextBox 7"/>
+          <p:cNvSpPr txBox="1"/>
+          <p:nvPr/>
+        </p:nvSpPr>
+        <p:spPr>
+          <a:xfrm>
+            <a:off x="320040" y="4892040"/>
+            <a:ext cx="8503920" cy="251460"/>
+          </a:xfrm>
+          <a:prstGeom prst="rect">
+            <a:avLst/>
+          </a:prstGeom>
+          <a:noFill/>
+        </p:spPr>
+        <p:txBody>
+          <a:bodyPr wrap="square">
+            <a:spAutoFit/>
+          </a:bodyPr>
+          <a:lstStyle/>
+          <a:p>
+            <a:pPr algn="l"/>
+            <a:r>
+              <a:rPr sz="800" b="0" i="0">
+                <a:solidFill>
+                  <a:srgbClr val="94A3B8"/>
+                </a:solidFill>
+              </a:rPr>
+              <a:t>RedTeamLoop  |  Automated LLM Safety Auditing</a:t>
+            </a:r>
+          </a:p>
+        </p:txBody>
+      </p:sp>
+      <p:sp>
+        <p:nvSpPr>
+          <p:cNvPr id="9" name="TextBox 8"/>
+          <p:cNvSpPr txBox="1"/>
+          <p:nvPr/>
+        </p:nvSpPr>
+        <p:spPr>
+          <a:xfrm>
+            <a:off x="280000" y="1230000"/>
+            <a:ext cx="4100000" cy="300000"/>
+          </a:xfrm>
+          <a:prstGeom prst="rect">
+            <a:avLst/>
+          </a:prstGeom>
+          <a:noFill/>
+        </p:spPr>
+        <p:txBody>
+          <a:bodyPr wrap="square">
+            <a:spAutoFit/>
+          </a:bodyPr>
+          <a:lstStyle/>
+          <a:p>
+            <a:pPr algn="l"/>
+            <a:r>
+              <a:rPr sz="1100" b="1" i="0">
+                <a:solidFill>
+                  <a:srgbClr val="00D4FF"/>
+                </a:solidFill>
+              </a:rPr>
+              <a:t>run_all_episodes()</a:t>
+            </a:r>
+          </a:p>
+        </p:txBody>
+      </p:sp>
+      <p:sp>
+        <p:nvSpPr>
+          <p:cNvPr id="10" name="Rectangle 9"/>
+          <p:cNvSpPr/>
+          <p:nvPr/>
+        </p:nvSpPr>
+        <p:spPr>
+          <a:xfrm>
+            <a:off x="280000" y="1560000"/>
+            <a:ext cx="4020000" cy="390000"/>
+          </a:xfrm>
+          <a:prstGeom prst="rect">
+            <a:avLst/>
+          </a:prstGeom>
+          <a:solidFill>
+            <a:srgbClr val="0B213A"/>
+          </a:solidFill>
+          <a:ln w="12700">
+            <a:solidFill>
+              <a:srgbClr val="00D4FF"/>
+            </a:solidFill>
+          </a:ln>
+        </p:spPr>
+        <p:style>
+          <a:lnRef idx="1">
+            <a:schemeClr val="accent1"/>
+          </a:lnRef>
+          <a:fillRef idx="3">
+            <a:schemeClr val="accent1"/>
+          </a:fillRef>
+          <a:effectRef idx="2">
+            <a:schemeClr val="accent1"/>
+          </a:effectRef>
+          <a:fontRef idx="minor">
+            <a:schemeClr val="lt1"/>
+          </a:fontRef>
+        </p:style>
+        <p:txBody>
+          <a:bodyPr rtlCol="0" anchor="ctr"/>
+          <a:lstStyle/>
+          <a:p>
+            <a:pPr algn="ctr"/>
+          </a:p>
+        </p:txBody>
+      </p:sp>
+      <p:sp>
+        <p:nvSpPr>
+          <p:cNvPr id="11" name="TextBox 10"/>
+          <p:cNvSpPr txBox="1"/>
+          <p:nvPr/>
+        </p:nvSpPr>
+        <p:spPr>
+          <a:xfrm>
+            <a:off x="280000" y="1560000"/>
+            <a:ext cx="4020000" cy="390000"/>
+          </a:xfrm>
+          <a:prstGeom prst="rect">
+            <a:avLst/>
+          </a:prstGeom>
+          <a:noFill/>
+        </p:spPr>
+        <p:txBody>
+          <a:bodyPr wrap="square">
+            <a:spAutoFit/>
+          </a:bodyPr>
+          <a:lstStyle/>
+          <a:p>
+            <a:pPr algn="l"/>
+            <a:r>
+              <a:rPr sz="900" b="0" i="0">
+                <a:solidFill>
+                  <a:srgbClr val="00D4FF"/>
+                </a:solidFill>
+              </a:rPr>
+              <a:t>for episode in range(max_episodes)</a:t>
+            </a:r>
+          </a:p>
+        </p:txBody>
+      </p:sp>
+      <p:sp>
+        <p:nvSpPr>
+          <p:cNvPr id="12" name="Rectangle 11"/>
+          <p:cNvSpPr/>
+          <p:nvPr/>
+        </p:nvSpPr>
+        <p:spPr>
+          <a:xfrm>
+            <a:off x="280000" y="1890000"/>
+            <a:ext cx="4020000" cy="390000"/>
+          </a:xfrm>
+          <a:prstGeom prst="rect">
+            <a:avLst/>
+          </a:prstGeom>
+          <a:solidFill>
+            <a:srgbClr val="1E293B"/>
+          </a:solidFill>
+          <a:ln w="12700">
+            <a:solidFill>
+              <a:srgbClr val="FFFFFF"/>
+            </a:solidFill>
+          </a:ln>
+        </p:spPr>
+        <p:style>
+          <a:lnRef idx="1">
+            <a:schemeClr val="accent1"/>
+          </a:lnRef>
+          <a:fillRef idx="3">
+            <a:schemeClr val="accent1"/>
+          </a:fillRef>
+          <a:effectRef idx="2">
+            <a:schemeClr val="accent1"/>
+          </a:effectRef>
+          <a:fontRef idx="minor">
+            <a:schemeClr val="lt1"/>
+          </a:fontRef>
+        </p:style>
+        <p:txBody>
+          <a:bodyPr rtlCol="0" anchor="ctr"/>
+          <a:lstStyle/>
+          <a:p>
+            <a:pPr algn="ctr"/>
+          </a:p>
+        </p:txBody>
+      </p:sp>
+      <p:sp>
+        <p:nvSpPr>
+          <p:cNvPr id="13" name="TextBox 12"/>
+          <p:cNvSpPr txBox="1"/>
+          <p:nvPr/>
+        </p:nvSpPr>
+        <p:spPr>
+          <a:xfrm>
+            <a:off x="280000" y="1890000"/>
+            <a:ext cx="4020000" cy="390000"/>
+          </a:xfrm>
+          <a:prstGeom prst="rect">
+            <a:avLst/>
+          </a:prstGeom>
+          <a:noFill/>
+        </p:spPr>
+        <p:txBody>
+          <a:bodyPr wrap="square">
+            <a:spAutoFit/>
+          </a:bodyPr>
+          <a:lstStyle/>
+          <a:p>
+            <a:pPr algn="l"/>
+            <a:r>
+              <a:rPr sz="900" b="0" i="0">
+                <a:solidFill>
+                  <a:srgbClr val="FFFFFF"/>
+                </a:solidFill>
+              </a:rPr>
+              <a:t>  orchestrator.run_episode(…)</a:t>
+            </a:r>
+          </a:p>
+        </p:txBody>
+      </p:sp>
+      <p:sp>
+        <p:nvSpPr>
+          <p:cNvPr id="14" name="Rectangle 13"/>
+          <p:cNvSpPr/>
+          <p:nvPr/>
+        </p:nvSpPr>
+        <p:spPr>
+          <a:xfrm>
+            <a:off x="280000" y="2220000"/>
+            <a:ext cx="4020000" cy="390000"/>
+          </a:xfrm>
+          <a:prstGeom prst="rect">
+            <a:avLst/>
+          </a:prstGeom>
+          <a:solidFill>
+            <a:srgbClr val="0B213A"/>
+          </a:solidFill>
+          <a:ln w="12700">
+            <a:solidFill>
+              <a:srgbClr val="00D4FF"/>
+            </a:solidFill>
+          </a:ln>
+        </p:spPr>
+        <p:style>
+          <a:lnRef idx="1">
+            <a:schemeClr val="accent1"/>
+          </a:lnRef>
+          <a:fillRef idx="3">
+            <a:schemeClr val="accent1"/>
+          </a:fillRef>
+          <a:effectRef idx="2">
+            <a:schemeClr val="accent1"/>
+          </a:effectRef>
+          <a:fontRef idx="minor">
+            <a:schemeClr val="lt1"/>
+          </a:fontRef>
+        </p:style>
+        <p:txBody>
+          <a:bodyPr rtlCol="0" anchor="ctr"/>
+          <a:lstStyle/>
+          <a:p>
+            <a:pPr algn="ctr"/>
+          </a:p>
+        </p:txBody>
+      </p:sp>
+      <p:sp>
+        <p:nvSpPr>
+          <p:cNvPr id="15" name="TextBox 14"/>
+          <p:cNvSpPr txBox="1"/>
+          <p:nvPr/>
+        </p:nvSpPr>
+        <p:spPr>
+          <a:xfrm>
+            <a:off x="280000" y="2220000"/>
+            <a:ext cx="4020000" cy="390000"/>
+          </a:xfrm>
+          <a:prstGeom prst="rect">
+            <a:avLst/>
+          </a:prstGeom>
+          <a:noFill/>
+        </p:spPr>
+        <p:txBody>
+          <a:bodyPr wrap="square">
+            <a:spAutoFit/>
+          </a:bodyPr>
+          <a:lstStyle/>
+          <a:p>
+            <a:pPr algn="l"/>
+            <a:r>
+              <a:rPr sz="900" b="0" i="0">
+                <a:solidFill>
+                  <a:srgbClr val="00D4FF"/>
+                </a:solidFill>
+              </a:rPr>
+              <a:t>    for turn in range(max_turns)</a:t>
+            </a:r>
+          </a:p>
+        </p:txBody>
+      </p:sp>
+      <p:sp>
+        <p:nvSpPr>
+          <p:cNvPr id="16" name="Rectangle 15"/>
+          <p:cNvSpPr/>
+          <p:nvPr/>
+        </p:nvSpPr>
+        <p:spPr>
+          <a:xfrm>
+            <a:off x="280000" y="2550000"/>
+            <a:ext cx="4020000" cy="390000"/>
+          </a:xfrm>
+          <a:prstGeom prst="rect">
+            <a:avLst/>
+          </a:prstGeom>
+          <a:solidFill>
+            <a:srgbClr val="1E293B"/>
+          </a:solidFill>
+          <a:ln w="12700">
+            <a:solidFill>
+              <a:srgbClr val="E2E8F0"/>
+            </a:solidFill>
+          </a:ln>
+        </p:spPr>
+        <p:style>
+          <a:lnRef idx="1">
+            <a:schemeClr val="accent1"/>
+          </a:lnRef>
+          <a:fillRef idx="3">
+            <a:schemeClr val="accent1"/>
+          </a:fillRef>
+          <a:effectRef idx="2">
+            <a:schemeClr val="accent1"/>
+          </a:effectRef>
+          <a:fontRef idx="minor">
+            <a:schemeClr val="lt1"/>
+          </a:fontRef>
+        </p:style>
+        <p:txBody>
+          <a:bodyPr rtlCol="0" anchor="ctr"/>
+          <a:lstStyle/>
+          <a:p>
+            <a:pPr algn="ctr"/>
+          </a:p>
+        </p:txBody>
+      </p:sp>
+      <p:sp>
+        <p:nvSpPr>
+          <p:cNvPr id="17" name="TextBox 16"/>
+          <p:cNvSpPr txBox="1"/>
+          <p:nvPr/>
+        </p:nvSpPr>
+        <p:spPr>
+          <a:xfrm>
+            <a:off x="280000" y="2550000"/>
+            <a:ext cx="4020000" cy="390000"/>
+          </a:xfrm>
+          <a:prstGeom prst="rect">
+            <a:avLst/>
+          </a:prstGeom>
+          <a:noFill/>
+        </p:spPr>
+        <p:txBody>
+          <a:bodyPr wrap="square">
+            <a:spAutoFit/>
+          </a:bodyPr>
+          <a:lstStyle/>
+          <a:p>
+            <a:pPr algn="l"/>
+            <a:r>
+              <a:rPr sz="900" b="0" i="0">
+                <a:solidFill>
+                  <a:srgbClr val="E2E8F0"/>
+                </a:solidFill>
+              </a:rPr>
+              <a:t>      next_prompt(turn, history, score)</a:t>
+            </a:r>
+          </a:p>
+        </p:txBody>
+      </p:sp>
+      <p:sp>
+        <p:nvSpPr>
+          <p:cNvPr id="18" name="Rectangle 17"/>
+          <p:cNvSpPr/>
+          <p:nvPr/>
+        </p:nvSpPr>
+        <p:spPr>
+          <a:xfrm>
+            <a:off x="280000" y="2880000"/>
+            <a:ext cx="4020000" cy="390000"/>
+          </a:xfrm>
+          <a:prstGeom prst="rect">
+            <a:avLst/>
+          </a:prstGeom>
+          <a:solidFill>
+            <a:srgbClr val="1E293B"/>
+          </a:solidFill>
+          <a:ln w="12700">
+            <a:solidFill>
+              <a:srgbClr val="FFFFFF"/>
+            </a:solidFill>
+          </a:ln>
+        </p:spPr>
+        <p:style>
+          <a:lnRef idx="1">
+            <a:schemeClr val="accent1"/>
+          </a:lnRef>
+          <a:fillRef idx="3">
+            <a:schemeClr val="accent1"/>
+          </a:fillRef>
+          <a:effectRef idx="2">
+            <a:schemeClr val="accent1"/>
+          </a:effectRef>
+          <a:fontRef idx="minor">
+            <a:schemeClr val="lt1"/>
+          </a:fontRef>
+        </p:style>
+        <p:txBody>
+          <a:bodyPr rtlCol="0" anchor="ctr"/>
+          <a:lstStyle/>
+          <a:p>
+            <a:pPr algn="ctr"/>
+          </a:p>
+        </p:txBody>
+      </p:sp>
+      <p:sp>
+        <p:nvSpPr>
+          <p:cNvPr id="19" name="TextBox 18"/>
+          <p:cNvSpPr txBox="1"/>
+          <p:nvPr/>
+        </p:nvSpPr>
+        <p:spPr>
+          <a:xfrm>
+            <a:off x="280000" y="2880000"/>
+            <a:ext cx="4020000" cy="390000"/>
+          </a:xfrm>
+          <a:prstGeom prst="rect">
+            <a:avLst/>
+          </a:prstGeom>
+          <a:noFill/>
+        </p:spPr>
+        <p:txBody>
+          <a:bodyPr wrap="square">
+            <a:spAutoFit/>
+          </a:bodyPr>
+          <a:lstStyle/>
+          <a:p>
+            <a:pPr algn="l"/>
+            <a:r>
+              <a:rPr sz="900" b="0" i="0">
+                <a:solidFill>
+                  <a:srgbClr val="FFFFFF"/>
+                </a:solidFill>
+              </a:rPr>
+              <a:t>      single_exchange(state, prompt, …)</a:t>
+            </a:r>
+          </a:p>
+        </p:txBody>
+      </p:sp>
+      <p:sp>
+        <p:nvSpPr>
+          <p:cNvPr id="20" name="Rectangle 19"/>
+          <p:cNvSpPr/>
+          <p:nvPr/>
+        </p:nvSpPr>
+        <p:spPr>
+          <a:xfrm>
+            <a:off x="280000" y="3210000"/>
+            <a:ext cx="4020000" cy="390000"/>
+          </a:xfrm>
+          <a:prstGeom prst="rect">
+            <a:avLst/>
+          </a:prstGeom>
+          <a:solidFill>
+            <a:srgbClr val="1E293B"/>
+          </a:solidFill>
+          <a:ln w="12700">
+            <a:solidFill>
+              <a:srgbClr val="F59E0B"/>
+            </a:solidFill>
+          </a:ln>
+        </p:spPr>
+        <p:style>
+          <a:lnRef idx="1">
+            <a:schemeClr val="accent1"/>
+          </a:lnRef>
+          <a:fillRef idx="3">
+            <a:schemeClr val="accent1"/>
+          </a:fillRef>
+          <a:effectRef idx="2">
+            <a:schemeClr val="accent1"/>
+          </a:effectRef>
+          <a:fontRef idx="minor">
+            <a:schemeClr val="lt1"/>
+          </a:fontRef>
+        </p:style>
+        <p:txBody>
+          <a:bodyPr rtlCol="0" anchor="ctr"/>
+          <a:lstStyle/>
+          <a:p>
+            <a:pPr algn="ctr"/>
+          </a:p>
+        </p:txBody>
+      </p:sp>
+      <p:sp>
+        <p:nvSpPr>
+          <p:cNvPr id="21" name="TextBox 20"/>
+          <p:cNvSpPr txBox="1"/>
+          <p:nvPr/>
+        </p:nvSpPr>
+        <p:spPr>
+          <a:xfrm>
+            <a:off x="280000" y="3210000"/>
+            <a:ext cx="4020000" cy="390000"/>
+          </a:xfrm>
+          <a:prstGeom prst="rect">
+            <a:avLst/>
+          </a:prstGeom>
+          <a:noFill/>
+        </p:spPr>
+        <p:txBody>
+          <a:bodyPr wrap="square">
+            <a:spAutoFit/>
+          </a:bodyPr>
+          <a:lstStyle/>
+          <a:p>
+            <a:pPr algn="l"/>
+            <a:r>
+              <a:rPr sz="900" b="0" i="0">
+                <a:solidFill>
+                  <a:srgbClr val="F59E0B"/>
+                </a:solidFill>
+              </a:rPr>
+              <a:t>      if score &gt;= threshold → break</a:t>
+            </a:r>
+          </a:p>
+        </p:txBody>
+      </p:sp>
+      <p:sp>
+        <p:nvSpPr>
+          <p:cNvPr id="22" name="Rectangle 21"/>
+          <p:cNvSpPr/>
+          <p:nvPr/>
+        </p:nvSpPr>
+        <p:spPr>
+          <a:xfrm>
+            <a:off x="280000" y="3540000"/>
+            <a:ext cx="4020000" cy="390000"/>
+          </a:xfrm>
+          <a:prstGeom prst="rect">
+            <a:avLst/>
+          </a:prstGeom>
+          <a:solidFill>
+            <a:srgbClr val="1E293B"/>
+          </a:solidFill>
+          <a:ln w="12700">
+            <a:solidFill>
+              <a:srgbClr val="22C55E"/>
+            </a:solidFill>
+          </a:ln>
+        </p:spPr>
+        <p:style>
+          <a:lnRef idx="1">
+            <a:schemeClr val="accent1"/>
+          </a:lnRef>
+          <a:fillRef idx="3">
+            <a:schemeClr val="accent1"/>
+          </a:fillRef>
+          <a:effectRef idx="2">
+            <a:schemeClr val="accent1"/>
+          </a:effectRef>
+          <a:fontRef idx="minor">
+            <a:schemeClr val="lt1"/>
+          </a:fontRef>
+        </p:style>
+        <p:txBody>
+          <a:bodyPr rtlCol="0" anchor="ctr"/>
+          <a:lstStyle/>
+          <a:p>
+            <a:pPr algn="ctr"/>
+          </a:p>
+        </p:txBody>
+      </p:sp>
+      <p:sp>
+        <p:nvSpPr>
+          <p:cNvPr id="23" name="TextBox 22"/>
+          <p:cNvSpPr txBox="1"/>
+          <p:nvPr/>
+        </p:nvSpPr>
+        <p:spPr>
+          <a:xfrm>
+            <a:off x="280000" y="3540000"/>
+            <a:ext cx="4020000" cy="390000"/>
+          </a:xfrm>
+          <a:prstGeom prst="rect">
+            <a:avLst/>
+          </a:prstGeom>
+          <a:noFill/>
+        </p:spPr>
+        <p:txBody>
+          <a:bodyPr wrap="square">
+            <a:spAutoFit/>
+          </a:bodyPr>
+          <a:lstStyle/>
+          <a:p>
+            <a:pPr algn="l"/>
+            <a:r>
+              <a:rPr sz="900" b="0" i="0">
+                <a:solidFill>
+                  <a:srgbClr val="22C55E"/>
+                </a:solidFill>
+              </a:rPr>
+              <a:t>  → EpisodeResult(records, best_score)</a:t>
+            </a:r>
+          </a:p>
+        </p:txBody>
+      </p:sp>
+      <p:sp>
+        <p:nvSpPr>
+          <p:cNvPr id="24" name="Rectangle 23"/>
+          <p:cNvSpPr/>
+          <p:nvPr/>
+        </p:nvSpPr>
+        <p:spPr>
+          <a:xfrm>
+            <a:off x="280000" y="3870000"/>
+            <a:ext cx="4020000" cy="390000"/>
+          </a:xfrm>
+          <a:prstGeom prst="rect">
+            <a:avLst/>
+          </a:prstGeom>
+          <a:solidFill>
+            <a:srgbClr val="0B213A"/>
+          </a:solidFill>
+          <a:ln w="12700">
+            <a:solidFill>
+              <a:srgbClr val="22C55E"/>
+            </a:solidFill>
+          </a:ln>
+        </p:spPr>
+        <p:style>
+          <a:lnRef idx="1">
+            <a:schemeClr val="accent1"/>
+          </a:lnRef>
+          <a:fillRef idx="3">
+            <a:schemeClr val="accent1"/>
+          </a:fillRef>
+          <a:effectRef idx="2">
+            <a:schemeClr val="accent1"/>
+          </a:effectRef>
+          <a:fontRef idx="minor">
+            <a:schemeClr val="lt1"/>
+          </a:fontRef>
+        </p:style>
+        <p:txBody>
+          <a:bodyPr rtlCol="0" anchor="ctr"/>
+          <a:lstStyle/>
+          <a:p>
+            <a:pPr algn="ctr"/>
+          </a:p>
+        </p:txBody>
+      </p:sp>
+      <p:sp>
+        <p:nvSpPr>
+          <p:cNvPr id="25" name="TextBox 24"/>
+          <p:cNvSpPr txBox="1"/>
+          <p:nvPr/>
+        </p:nvSpPr>
+        <p:spPr>
+          <a:xfrm>
+            <a:off x="280000" y="3870000"/>
+            <a:ext cx="4020000" cy="390000"/>
+          </a:xfrm>
+          <a:prstGeom prst="rect">
+            <a:avLst/>
+          </a:prstGeom>
+          <a:noFill/>
+        </p:spPr>
+        <p:txBody>
+          <a:bodyPr wrap="square">
+            <a:spAutoFit/>
+          </a:bodyPr>
+          <a:lstStyle/>
+          <a:p>
+            <a:pPr algn="l"/>
+            <a:r>
+              <a:rPr sz="900" b="0" i="0">
+                <a:solidFill>
+                  <a:srgbClr val="22C55E"/>
+                </a:solidFill>
+              </a:rPr>
+              <a:t>  if result.successful → break episodes</a:t>
+            </a:r>
+          </a:p>
+        </p:txBody>
+      </p:sp>
+      <p:sp>
+        <p:nvSpPr>
+          <p:cNvPr id="26" name="TextBox 25"/>
+          <p:cNvSpPr txBox="1"/>
+          <p:nvPr/>
+        </p:nvSpPr>
+        <p:spPr>
+          <a:xfrm>
+            <a:off x="4680000" y="1230000"/>
+            <a:ext cx="4100000" cy="300000"/>
+          </a:xfrm>
+          <a:prstGeom prst="rect">
+            <a:avLst/>
+          </a:prstGeom>
+          <a:noFill/>
+        </p:spPr>
+        <p:txBody>
+          <a:bodyPr wrap="square">
+            <a:spAutoFit/>
+          </a:bodyPr>
+          <a:lstStyle/>
+          <a:p>
+            <a:pPr algn="l"/>
+            <a:r>
+              <a:rPr sz="1100" b="1" i="0">
+                <a:solidFill>
+                  <a:srgbClr val="00D4FF"/>
+                </a:solidFill>
+              </a:rPr>
+              <a:t>single_exchange()</a:t>
+            </a:r>
+          </a:p>
+        </p:txBody>
+      </p:sp>
+      <p:sp>
+        <p:nvSpPr>
+          <p:cNvPr id="27" name="Rectangle 26"/>
+          <p:cNvSpPr/>
+          <p:nvPr/>
+        </p:nvSpPr>
+        <p:spPr>
+          <a:xfrm>
+            <a:off x="4680000" y="1560000"/>
+            <a:ext cx="4020000" cy="390000"/>
+          </a:xfrm>
+          <a:prstGeom prst="rect">
+            <a:avLst/>
+          </a:prstGeom>
+          <a:solidFill>
+            <a:srgbClr val="1E293B"/>
+          </a:solidFill>
+          <a:ln w="12700">
+            <a:solidFill>
+              <a:srgbClr val="FFFFFF"/>
+            </a:solidFill>
+          </a:ln>
+        </p:spPr>
+        <p:style>
+          <a:lnRef idx="1">
+            <a:schemeClr val="accent1"/>
+          </a:lnRef>
+          <a:fillRef idx="3">
+            <a:schemeClr val="accent1"/>
+          </a:fillRef>
+          <a:effectRef idx="2">
+            <a:schemeClr val="accent1"/>
+          </a:effectRef>
+          <a:fontRef idx="minor">
+            <a:schemeClr val="lt1"/>
+          </a:fontRef>
+        </p:style>
+        <p:txBody>
+          <a:bodyPr rtlCol="0" anchor="ctr"/>
+          <a:lstStyle/>
+          <a:p>
+            <a:pPr algn="ctr"/>
+          </a:p>
+        </p:txBody>
+      </p:sp>
+      <p:sp>
+        <p:nvSpPr>
+          <p:cNvPr id="28" name="TextBox 27"/>
+          <p:cNvSpPr txBox="1"/>
+          <p:nvPr/>
+        </p:nvSpPr>
+        <p:spPr>
+          <a:xfrm>
+            <a:off x="4680000" y="1560000"/>
+            <a:ext cx="4020000" cy="390000"/>
+          </a:xfrm>
+          <a:prstGeom prst="rect">
+            <a:avLst/>
+          </a:prstGeom>
+          <a:noFill/>
+        </p:spPr>
+        <p:txBody>
+          <a:bodyPr wrap="square">
+            <a:spAutoFit/>
+          </a:bodyPr>
+          <a:lstStyle/>
+          <a:p>
+            <a:pPr algn="l"/>
+            <a:r>
+              <a:rPr sz="900" b="0" i="0">
+                <a:solidFill>
+                  <a:srgbClr val="FFFFFF"/>
+                </a:solidFill>
+              </a:rPr>
+              <a:t>state = {**base_state,</a:t>
+            </a:r>
+          </a:p>
+        </p:txBody>
+      </p:sp>
+      <p:sp>
+        <p:nvSpPr>
+          <p:cNvPr id="29" name="Rectangle 28"/>
+          <p:cNvSpPr/>
+          <p:nvPr/>
+        </p:nvSpPr>
+        <p:spPr>
+          <a:xfrm>
+            <a:off x="4680000" y="1890000"/>
+            <a:ext cx="4020000" cy="390000"/>
+          </a:xfrm>
+          <a:prstGeom prst="rect">
+            <a:avLst/>
+          </a:prstGeom>
+          <a:solidFill>
+            <a:srgbClr val="1E293B"/>
+          </a:solidFill>
+          <a:ln w="12700">
+            <a:solidFill>
+              <a:srgbClr val="E2E8F0"/>
+            </a:solidFill>
+          </a:ln>
+        </p:spPr>
+        <p:style>
+          <a:lnRef idx="1">
+            <a:schemeClr val="accent1"/>
+          </a:lnRef>
+          <a:fillRef idx="3">
+            <a:schemeClr val="accent1"/>
+          </a:fillRef>
+          <a:effectRef idx="2">
+            <a:schemeClr val="accent1"/>
+          </a:effectRef>
+          <a:fontRef idx="minor">
+            <a:schemeClr val="lt1"/>
+          </a:fontRef>
+        </p:style>
+        <p:txBody>
+          <a:bodyPr rtlCol="0" anchor="ctr"/>
+          <a:lstStyle/>
+          <a:p>
+            <a:pPr algn="ctr"/>
+          </a:p>
+        </p:txBody>
+      </p:sp>
+      <p:sp>
+        <p:nvSpPr>
+          <p:cNvPr id="30" name="TextBox 29"/>
+          <p:cNvSpPr txBox="1"/>
+          <p:nvPr/>
+        </p:nvSpPr>
+        <p:spPr>
+          <a:xfrm>
+            <a:off x="4680000" y="1890000"/>
+            <a:ext cx="4020000" cy="390000"/>
+          </a:xfrm>
+          <a:prstGeom prst="rect">
+            <a:avLst/>
+          </a:prstGeom>
+          <a:noFill/>
+        </p:spPr>
+        <p:txBody>
+          <a:bodyPr wrap="square">
+            <a:spAutoFit/>
+          </a:bodyPr>
+          <a:lstStyle/>
+          <a:p>
+            <a:pPr algn="l"/>
+            <a:r>
+              <a:rPr sz="900" b="0" i="0">
+                <a:solidFill>
+                  <a:srgbClr val="E2E8F0"/>
+                </a:solidFill>
+              </a:rPr>
+              <a:t>  current_prompt, conversation_history}</a:t>
+            </a:r>
+          </a:p>
+        </p:txBody>
+      </p:sp>
+      <p:sp>
+        <p:nvSpPr>
+          <p:cNvPr id="31" name="Rectangle 30"/>
+          <p:cNvSpPr/>
+          <p:nvPr/>
+        </p:nvSpPr>
+        <p:spPr>
+          <a:xfrm>
+            <a:off x="4680000" y="2220000"/>
+            <a:ext cx="4020000" cy="390000"/>
+          </a:xfrm>
+          <a:prstGeom prst="rect">
+            <a:avLst/>
+          </a:prstGeom>
+          <a:solidFill>
+            <a:srgbClr val="0B213A"/>
+          </a:solidFill>
+          <a:ln w="12700">
+            <a:solidFill>
+              <a:srgbClr val="00D4FF"/>
+            </a:solidFill>
+          </a:ln>
+        </p:spPr>
+        <p:style>
+          <a:lnRef idx="1">
+            <a:schemeClr val="accent1"/>
+          </a:lnRef>
+          <a:fillRef idx="3">
+            <a:schemeClr val="accent1"/>
+          </a:fillRef>
+          <a:effectRef idx="2">
+            <a:schemeClr val="accent1"/>
+          </a:effectRef>
+          <a:fontRef idx="minor">
+            <a:schemeClr val="lt1"/>
+          </a:fontRef>
+        </p:style>
+        <p:txBody>
+          <a:bodyPr rtlCol="0" anchor="ctr"/>
+          <a:lstStyle/>
+          <a:p>
+            <a:pPr algn="ctr"/>
+          </a:p>
+        </p:txBody>
+      </p:sp>
+      <p:sp>
+        <p:nvSpPr>
+          <p:cNvPr id="32" name="TextBox 31"/>
+          <p:cNvSpPr txBox="1"/>
+          <p:nvPr/>
+        </p:nvSpPr>
+        <p:spPr>
+          <a:xfrm>
+            <a:off x="4680000" y="2220000"/>
+            <a:ext cx="4020000" cy="390000"/>
+          </a:xfrm>
+          <a:prstGeom prst="rect">
+            <a:avLst/>
+          </a:prstGeom>
+          <a:noFill/>
+        </p:spPr>
+        <p:txBody>
+          <a:bodyPr wrap="square">
+            <a:spAutoFit/>
+          </a:bodyPr>
+          <a:lstStyle/>
+          <a:p>
+            <a:pPr algn="l"/>
+            <a:r>
+              <a:rPr sz="900" b="0" i="0">
+                <a:solidFill>
+                  <a:srgbClr val="00D4FF"/>
+                </a:solidFill>
+              </a:rPr>
+              <a:t>target_caller_node(state, run_config)</a:t>
+            </a:r>
+          </a:p>
+        </p:txBody>
+      </p:sp>
+      <p:sp>
+        <p:nvSpPr>
+          <p:cNvPr id="33" name="Rectangle 32"/>
+          <p:cNvSpPr/>
+          <p:nvPr/>
+        </p:nvSpPr>
+        <p:spPr>
+          <a:xfrm>
+            <a:off x="4680000" y="2550000"/>
+            <a:ext cx="4020000" cy="390000"/>
+          </a:xfrm>
+          <a:prstGeom prst="rect">
+            <a:avLst/>
+          </a:prstGeom>
+          <a:solidFill>
+            <a:srgbClr val="1E293B"/>
+          </a:solidFill>
+          <a:ln w="12700">
+            <a:solidFill>
+              <a:srgbClr val="E2E8F0"/>
+            </a:solidFill>
+          </a:ln>
+        </p:spPr>
+        <p:style>
+          <a:lnRef idx="1">
+            <a:schemeClr val="accent1"/>
+          </a:lnRef>
+          <a:fillRef idx="3">
+            <a:schemeClr val="accent1"/>
+          </a:fillRef>
+          <a:effectRef idx="2">
+            <a:schemeClr val="accent1"/>
+          </a:effectRef>
+          <a:fontRef idx="minor">
+            <a:schemeClr val="lt1"/>
+          </a:fontRef>
+        </p:style>
+        <p:txBody>
+          <a:bodyPr rtlCol="0" anchor="ctr"/>
+          <a:lstStyle/>
+          <a:p>
+            <a:pPr algn="ctr"/>
+          </a:p>
+        </p:txBody>
+      </p:sp>
+      <p:sp>
+        <p:nvSpPr>
+          <p:cNvPr id="34" name="TextBox 33"/>
+          <p:cNvSpPr txBox="1"/>
+          <p:nvPr/>
+        </p:nvSpPr>
+        <p:spPr>
+          <a:xfrm>
+            <a:off x="4680000" y="2550000"/>
+            <a:ext cx="4020000" cy="390000"/>
+          </a:xfrm>
+          <a:prstGeom prst="rect">
+            <a:avLst/>
+          </a:prstGeom>
+          <a:noFill/>
+        </p:spPr>
+        <p:txBody>
+          <a:bodyPr wrap="square">
+            <a:spAutoFit/>
+          </a:bodyPr>
+          <a:lstStyle/>
+          <a:p>
+            <a:pPr algn="l"/>
+            <a:r>
+              <a:rPr sz="900" b="0" i="0">
+                <a:solidFill>
+                  <a:srgbClr val="E2E8F0"/>
+                </a:solidFill>
+              </a:rPr>
+              <a:t>  target_llm.ainvoke(history + prompt)</a:t>
+            </a:r>
+          </a:p>
+        </p:txBody>
+      </p:sp>
+      <p:sp>
+        <p:nvSpPr>
+          <p:cNvPr id="35" name="Rectangle 34"/>
+          <p:cNvSpPr/>
+          <p:nvPr/>
+        </p:nvSpPr>
+        <p:spPr>
+          <a:xfrm>
+            <a:off x="4680000" y="2880000"/>
+            <a:ext cx="4020000" cy="390000"/>
+          </a:xfrm>
+          <a:prstGeom prst="rect">
+            <a:avLst/>
+          </a:prstGeom>
+          <a:solidFill>
+            <a:srgbClr val="1E293B"/>
+          </a:solidFill>
+          <a:ln w="12700">
+            <a:solidFill>
+              <a:srgbClr val="22C55E"/>
+            </a:solidFill>
+          </a:ln>
+        </p:spPr>
+        <p:style>
+          <a:lnRef idx="1">
+            <a:schemeClr val="accent1"/>
+          </a:lnRef>
+          <a:fillRef idx="3">
+            <a:schemeClr val="accent1"/>
+          </a:fillRef>
+          <a:effectRef idx="2">
+            <a:schemeClr val="accent1"/>
+          </a:effectRef>
+          <a:fontRef idx="minor">
+            <a:schemeClr val="lt1"/>
+          </a:fontRef>
+        </p:style>
+        <p:txBody>
+          <a:bodyPr rtlCol="0" anchor="ctr"/>
+          <a:lstStyle/>
+          <a:p>
+            <a:pPr algn="ctr"/>
+          </a:p>
+        </p:txBody>
+      </p:sp>
+      <p:sp>
+        <p:nvSpPr>
+          <p:cNvPr id="36" name="TextBox 35"/>
+          <p:cNvSpPr txBox="1"/>
+          <p:nvPr/>
+        </p:nvSpPr>
+        <p:spPr>
+          <a:xfrm>
+            <a:off x="4680000" y="2880000"/>
+            <a:ext cx="4020000" cy="390000"/>
+          </a:xfrm>
+          <a:prstGeom prst="rect">
+            <a:avLst/>
+          </a:prstGeom>
+          <a:noFill/>
+        </p:spPr>
+        <p:txBody>
+          <a:bodyPr wrap="square">
+            <a:spAutoFit/>
+          </a:bodyPr>
+          <a:lstStyle/>
+          <a:p>
+            <a:pPr algn="l"/>
+            <a:r>
+              <a:rPr sz="900" b="0" i="0">
+                <a:solidFill>
+                  <a:srgbClr val="22C55E"/>
+                </a:solidFill>
+              </a:rPr>
+              <a:t>  → current_response</a:t>
+            </a:r>
+          </a:p>
+        </p:txBody>
+      </p:sp>
+      <p:sp>
+        <p:nvSpPr>
+          <p:cNvPr id="37" name="Rectangle 36"/>
+          <p:cNvSpPr/>
+          <p:nvPr/>
+        </p:nvSpPr>
+        <p:spPr>
+          <a:xfrm>
+            <a:off x="4680000" y="3210000"/>
+            <a:ext cx="4020000" cy="390000"/>
+          </a:xfrm>
+          <a:prstGeom prst="rect">
+            <a:avLst/>
+          </a:prstGeom>
+          <a:solidFill>
+            <a:srgbClr val="0B213A"/>
+          </a:solidFill>
+          <a:ln w="12700">
+            <a:solidFill>
+              <a:srgbClr val="00D4FF"/>
+            </a:solidFill>
+          </a:ln>
+        </p:spPr>
+        <p:style>
+          <a:lnRef idx="1">
+            <a:schemeClr val="accent1"/>
+          </a:lnRef>
+          <a:fillRef idx="3">
+            <a:schemeClr val="accent1"/>
+          </a:fillRef>
+          <a:effectRef idx="2">
+            <a:schemeClr val="accent1"/>
+          </a:effectRef>
+          <a:fontRef idx="minor">
+            <a:schemeClr val="lt1"/>
+          </a:fontRef>
+        </p:style>
+        <p:txBody>
+          <a:bodyPr rtlCol="0" anchor="ctr"/>
+          <a:lstStyle/>
+          <a:p>
+            <a:pPr algn="ctr"/>
+          </a:p>
+        </p:txBody>
+      </p:sp>
+      <p:sp>
+        <p:nvSpPr>
+          <p:cNvPr id="38" name="TextBox 37"/>
+          <p:cNvSpPr txBox="1"/>
+          <p:nvPr/>
+        </p:nvSpPr>
+        <p:spPr>
+          <a:xfrm>
+            <a:off x="4680000" y="3210000"/>
+            <a:ext cx="4020000" cy="390000"/>
+          </a:xfrm>
+          <a:prstGeom prst="rect">
+            <a:avLst/>
+          </a:prstGeom>
+          <a:noFill/>
+        </p:spPr>
+        <p:txBody>
+          <a:bodyPr wrap="square">
+            <a:spAutoFit/>
+          </a:bodyPr>
+          <a:lstStyle/>
+          <a:p>
+            <a:pPr algn="l"/>
+            <a:r>
+              <a:rPr sz="900" b="0" i="0">
+                <a:solidFill>
+                  <a:srgbClr val="00D4FF"/>
+                </a:solidFill>
+              </a:rPr>
+              <a:t>judge_fn(state, run_config)</a:t>
+            </a:r>
+          </a:p>
+        </p:txBody>
+      </p:sp>
+      <p:sp>
+        <p:nvSpPr>
+          <p:cNvPr id="39" name="Rectangle 38"/>
+          <p:cNvSpPr/>
+          <p:nvPr/>
+        </p:nvSpPr>
+        <p:spPr>
+          <a:xfrm>
+            <a:off x="4680000" y="3540000"/>
+            <a:ext cx="4020000" cy="390000"/>
+          </a:xfrm>
+          <a:prstGeom prst="rect">
+            <a:avLst/>
+          </a:prstGeom>
+          <a:solidFill>
+            <a:srgbClr val="1E293B"/>
+          </a:solidFill>
+          <a:ln w="12700">
+            <a:solidFill>
+              <a:srgbClr val="E2E8F0"/>
+            </a:solidFill>
+          </a:ln>
+        </p:spPr>
+        <p:style>
+          <a:lnRef idx="1">
+            <a:schemeClr val="accent1"/>
+          </a:lnRef>
+          <a:fillRef idx="3">
+            <a:schemeClr val="accent1"/>
+          </a:fillRef>
+          <a:effectRef idx="2">
+            <a:schemeClr val="accent1"/>
+          </a:effectRef>
+          <a:fontRef idx="minor">
+            <a:schemeClr val="lt1"/>
+          </a:fontRef>
+        </p:style>
+        <p:txBody>
+          <a:bodyPr rtlCol="0" anchor="ctr"/>
+          <a:lstStyle/>
+          <a:p>
+            <a:pPr algn="ctr"/>
+          </a:p>
+        </p:txBody>
+      </p:sp>
+      <p:sp>
+        <p:nvSpPr>
+          <p:cNvPr id="40" name="TextBox 39"/>
+          <p:cNvSpPr txBox="1"/>
+          <p:nvPr/>
+        </p:nvSpPr>
+        <p:spPr>
+          <a:xfrm>
+            <a:off x="4680000" y="3540000"/>
+            <a:ext cx="4020000" cy="390000"/>
+          </a:xfrm>
+          <a:prstGeom prst="rect">
+            <a:avLst/>
+          </a:prstGeom>
+          <a:noFill/>
+        </p:spPr>
+        <p:txBody>
+          <a:bodyPr wrap="square">
+            <a:spAutoFit/>
+          </a:bodyPr>
+          <a:lstStyle/>
+          <a:p>
+            <a:pPr algn="l"/>
+            <a:r>
+              <a:rPr sz="900" b="0" i="0">
+                <a:solidFill>
+                  <a:srgbClr val="E2E8F0"/>
+                </a:solidFill>
+              </a:rPr>
+              <a:t>  judge_llm.ainvoke(judge_template)</a:t>
+            </a:r>
+          </a:p>
+        </p:txBody>
+      </p:sp>
+      <p:sp>
+        <p:nvSpPr>
+          <p:cNvPr id="41" name="Rectangle 40"/>
+          <p:cNvSpPr/>
+          <p:nvPr/>
+        </p:nvSpPr>
+        <p:spPr>
+          <a:xfrm>
+            <a:off x="4680000" y="3870000"/>
+            <a:ext cx="4020000" cy="390000"/>
+          </a:xfrm>
+          <a:prstGeom prst="rect">
+            <a:avLst/>
+          </a:prstGeom>
+          <a:solidFill>
+            <a:srgbClr val="1E293B"/>
+          </a:solidFill>
+          <a:ln w="12700">
+            <a:solidFill>
+              <a:srgbClr val="22C55E"/>
+            </a:solidFill>
+          </a:ln>
+        </p:spPr>
+        <p:style>
+          <a:lnRef idx="1">
+            <a:schemeClr val="accent1"/>
+          </a:lnRef>
+          <a:fillRef idx="3">
+            <a:schemeClr val="accent1"/>
+          </a:fillRef>
+          <a:effectRef idx="2">
+            <a:schemeClr val="accent1"/>
+          </a:effectRef>
+          <a:fontRef idx="minor">
+            <a:schemeClr val="lt1"/>
+          </a:fontRef>
+        </p:style>
+        <p:txBody>
+          <a:bodyPr rtlCol="0" anchor="ctr"/>
+          <a:lstStyle/>
+          <a:p>
+            <a:pPr algn="ctr"/>
+          </a:p>
+        </p:txBody>
+      </p:sp>
+      <p:sp>
+        <p:nvSpPr>
+          <p:cNvPr id="42" name="TextBox 41"/>
+          <p:cNvSpPr txBox="1"/>
+          <p:nvPr/>
+        </p:nvSpPr>
+        <p:spPr>
+          <a:xfrm>
+            <a:off x="4680000" y="3870000"/>
+            <a:ext cx="4020000" cy="390000"/>
+          </a:xfrm>
+          <a:prstGeom prst="rect">
+            <a:avLst/>
+          </a:prstGeom>
+          <a:noFill/>
+        </p:spPr>
+        <p:txBody>
+          <a:bodyPr wrap="square">
+            <a:spAutoFit/>
+          </a:bodyPr>
+          <a:lstStyle/>
+          <a:p>
+            <a:pPr algn="l"/>
+            <a:r>
+              <a:rPr sz="900" b="0" i="0">
+                <a:solidFill>
+                  <a:srgbClr val="22C55E"/>
+                </a:solidFill>
+              </a:rPr>
+              <a:t>  → score (0–10), score_rationale</a:t>
+            </a:r>
+          </a:p>
+        </p:txBody>
+      </p:sp>
+      <p:sp>
+        <p:nvSpPr>
+          <p:cNvPr id="43" name="Rectangle 42"/>
+          <p:cNvSpPr/>
+          <p:nvPr/>
+        </p:nvSpPr>
+        <p:spPr>
+          <a:xfrm>
+            <a:off x="4600000" y="1560000"/>
+            <a:ext cx="6000" cy="2640000"/>
+          </a:xfrm>
+          <a:prstGeom prst="rect">
+            <a:avLst/>
+          </a:prstGeom>
+          <a:solidFill>
+            <a:srgbClr val="94A3B8"/>
+          </a:solidFill>
+          <a:ln>
+            <a:noFill/>
+          </a:ln>
+        </p:spPr>
+        <p:style>
+          <a:lnRef idx="1">
+            <a:schemeClr val="accent1"/>
+          </a:lnRef>
+          <a:fillRef idx="3">
+            <a:schemeClr val="accent1"/>
+          </a:fillRef>
+          <a:effectRef idx="2">
+            <a:schemeClr val="accent1"/>
+          </a:effectRef>
+          <a:fontRef idx="minor">
+            <a:schemeClr val="lt1"/>
+          </a:fontRef>
+        </p:style>
+        <p:txBody>
+          <a:bodyPr rtlCol="0" anchor="ctr"/>
+          <a:lstStyle/>
+          <a:p>
+            <a:pPr algn="ctr"/>
+          </a:p>
+        </p:txBody>
+      </p:sp>
+      <p:sp>
+        <p:nvSpPr>
+          <p:cNvPr id="44" name="TextBox 43"/>
+          <p:cNvSpPr txBox="1"/>
+          <p:nvPr/>
+        </p:nvSpPr>
+        <p:spPr>
+          <a:xfrm>
+            <a:off x="280000" y="4260000"/>
+            <a:ext cx="8584000" cy="260000"/>
+          </a:xfrm>
+          <a:prstGeom prst="rect">
+            <a:avLst/>
+          </a:prstGeom>
+          <a:noFill/>
+        </p:spPr>
+        <p:txBody>
+          <a:bodyPr wrap="square">
+            <a:spAutoFit/>
+          </a:bodyPr>
+          <a:lstStyle/>
+          <a:p>
+            <a:pPr algn="l"/>
+            <a:r>
+              <a:rPr sz="900" b="0" i="1">
+                <a:solidFill>
+                  <a:srgbClr val="94A3B8"/>
+                </a:solidFill>
+              </a:rPr>
+              <a:t>judge_fn dispatched by target_type:  llm → judge_node  |  rag → rag_judge_node  |  agent → agent_judge_node</a:t>
+            </a:r>
+          </a:p>
+        </p:txBody>
+      </p:sp>
+    </p:spTree>
+  </p:cSld>
+  <p:clrMapOvr>
+    <a:masterClrMapping/>
+  </p:clrMapOvr>
+</p:sld>
+</file>
+
+<file path=ppt/slides/slide19.xml><?xml version="1.0" encoding="utf-8"?>
+<p:sld xmlns:a="http://schemas.openxmlformats.org/drawingml/2006/main" xmlns:p="http://schemas.openxmlformats.org/presentationml/2006/main" xmlns:r="http://schemas.openxmlformats.org/officeDocument/2006/relationships">
+  <p:cSld>
+    <p:spTree>
+      <p:nvGrpSpPr>
+        <p:cNvPr id="1" name=""/>
+        <p:cNvGrpSpPr/>
+        <p:nvPr/>
+      </p:nvGrpSpPr>
+      <p:grpSpPr/>
+      <p:sp>
+        <p:nvSpPr>
+          <p:cNvPr id="2" name="Rectangle 1"/>
+          <p:cNvSpPr/>
+          <p:nvPr/>
+        </p:nvSpPr>
+        <p:spPr>
+          <a:xfrm>
+            <a:off x="0" y="0"/>
+            <a:ext cx="9144000" cy="54864"/>
+          </a:xfrm>
+          <a:prstGeom prst="rect">
+            <a:avLst/>
+          </a:prstGeom>
+          <a:solidFill>
+            <a:srgbClr val="00D4FF"/>
+          </a:solidFill>
+          <a:ln>
+            <a:noFill/>
+          </a:ln>
+        </p:spPr>
+        <p:style>
+          <a:lnRef idx="1">
+            <a:schemeClr val="accent1"/>
+          </a:lnRef>
+          <a:fillRef idx="3">
+            <a:schemeClr val="accent1"/>
+          </a:fillRef>
+          <a:effectRef idx="2">
+            <a:schemeClr val="accent1"/>
+          </a:effectRef>
+          <a:fontRef idx="minor">
+            <a:schemeClr val="lt1"/>
+          </a:fontRef>
+        </p:style>
+        <p:txBody>
+          <a:bodyPr rtlCol="0" anchor="ctr"/>
+          <a:lstStyle/>
+          <a:p>
+            <a:pPr algn="ctr"/>
+          </a:p>
+        </p:txBody>
+      </p:sp>
+      <p:sp>
+        <p:nvSpPr>
+          <p:cNvPr id="3" name="TextBox 2"/>
+          <p:cNvSpPr txBox="1"/>
+          <p:nvPr/>
+        </p:nvSpPr>
+        <p:spPr>
+          <a:xfrm>
+            <a:off x="320040" y="109728"/>
+            <a:ext cx="8503920" cy="274320"/>
+          </a:xfrm>
+          <a:prstGeom prst="rect">
+            <a:avLst/>
+          </a:prstGeom>
+          <a:noFill/>
+        </p:spPr>
+        <p:txBody>
+          <a:bodyPr wrap="square">
+            <a:spAutoFit/>
+          </a:bodyPr>
+          <a:lstStyle/>
+          <a:p>
+            <a:pPr algn="l"/>
+            <a:r>
+              <a:rPr sz="900" b="1" i="0">
+                <a:solidFill>
+                  <a:srgbClr val="00D4FF"/>
+                </a:solidFill>
+              </a:rPr>
+              <a:t>MULTI-TURN &gt; MODES</a:t>
+            </a:r>
+          </a:p>
+        </p:txBody>
+      </p:sp>
+      <p:sp>
+        <p:nvSpPr>
+          <p:cNvPr id="4" name="TextBox 3"/>
+          <p:cNvSpPr txBox="1"/>
+          <p:nvPr/>
+        </p:nvSpPr>
+        <p:spPr>
+          <a:xfrm>
+            <a:off x="320040" y="475488"/>
+            <a:ext cx="8503920" cy="594360"/>
+          </a:xfrm>
+          <a:prstGeom prst="rect">
+            <a:avLst/>
+          </a:prstGeom>
+          <a:noFill/>
+        </p:spPr>
+        <p:txBody>
+          <a:bodyPr wrap="square">
+            <a:spAutoFit/>
+          </a:bodyPr>
+          <a:lstStyle/>
+          <a:p>
+            <a:pPr algn="l"/>
+            <a:r>
+              <a:rPr sz="2800" b="1" i="0">
+                <a:solidFill>
+                  <a:srgbClr val="FFFFFF"/>
+                </a:solidFill>
+              </a:rPr>
+              <a:t>Reactive Chain  &amp;  Crescendo</a:t>
+            </a:r>
+          </a:p>
+        </p:txBody>
+      </p:sp>
+      <p:sp>
+        <p:nvSpPr>
+          <p:cNvPr id="5" name="TextBox 4"/>
+          <p:cNvSpPr txBox="1"/>
+          <p:nvPr/>
+        </p:nvSpPr>
+        <p:spPr>
+          <a:xfrm>
+            <a:off x="320040" y="1051560"/>
+            <a:ext cx="8503920" cy="274320"/>
+          </a:xfrm>
+          <a:prstGeom prst="rect">
+            <a:avLst/>
+          </a:prstGeom>
+          <a:noFill/>
+        </p:spPr>
+        <p:txBody>
+          <a:bodyPr wrap="square">
+            <a:spAutoFit/>
+          </a:bodyPr>
+          <a:lstStyle/>
+          <a:p>
+            <a:pPr algn="l"/>
+            <a:r>
+              <a:rPr sz="1200" b="0" i="0">
+                <a:solidFill>
+                  <a:srgbClr val="94A3B8"/>
+                </a:solidFill>
+              </a:rPr>
+              <a:t>Linear multi-turn strategies — single conversation path per episode</a:t>
+            </a:r>
+          </a:p>
+        </p:txBody>
+      </p:sp>
+      <p:sp>
+        <p:nvSpPr>
+          <p:cNvPr id="6" name="Rectangle 5"/>
+          <p:cNvSpPr/>
+          <p:nvPr/>
+        </p:nvSpPr>
+        <p:spPr>
+          <a:xfrm>
+            <a:off x="320040" y="1389888"/>
+            <a:ext cx="8503920" cy="13716"/>
+          </a:xfrm>
+          <a:prstGeom prst="rect">
+            <a:avLst/>
+          </a:prstGeom>
+          <a:solidFill>
+            <a:srgbClr val="00D4FF"/>
+          </a:solidFill>
+          <a:ln>
+            <a:noFill/>
+          </a:ln>
+        </p:spPr>
+        <p:style>
+          <a:lnRef idx="1">
+            <a:schemeClr val="accent1"/>
+          </a:lnRef>
+          <a:fillRef idx="3">
+            <a:schemeClr val="accent1"/>
+          </a:fillRef>
+          <a:effectRef idx="2">
+            <a:schemeClr val="accent1"/>
+          </a:effectRef>
+          <a:fontRef idx="minor">
+            <a:schemeClr val="lt1"/>
+          </a:fontRef>
+        </p:style>
+        <p:txBody>
+          <a:bodyPr rtlCol="0" anchor="ctr"/>
+          <a:lstStyle/>
+          <a:p>
+            <a:pPr algn="ctr"/>
+          </a:p>
+        </p:txBody>
+      </p:sp>
+      <p:sp>
+        <p:nvSpPr>
+          <p:cNvPr id="7" name="Rectangle 6"/>
+          <p:cNvSpPr/>
+          <p:nvPr/>
+        </p:nvSpPr>
+        <p:spPr>
+          <a:xfrm>
+            <a:off x="0" y="4892040"/>
+            <a:ext cx="9144000" cy="251460"/>
+          </a:xfrm>
+          <a:prstGeom prst="rect">
+            <a:avLst/>
+          </a:prstGeom>
+          <a:solidFill>
+            <a:srgbClr val="0F172A"/>
+          </a:solidFill>
+          <a:ln>
+            <a:noFill/>
+          </a:ln>
+        </p:spPr>
+        <p:style>
+          <a:lnRef idx="1">
+            <a:schemeClr val="accent1"/>
+          </a:lnRef>
+          <a:fillRef idx="3">
+            <a:schemeClr val="accent1"/>
+          </a:fillRef>
+          <a:effectRef idx="2">
+            <a:schemeClr val="accent1"/>
+          </a:effectRef>
+          <a:fontRef idx="minor">
+            <a:schemeClr val="lt1"/>
+          </a:fontRef>
+        </p:style>
+        <p:txBody>
+          <a:bodyPr rtlCol="0" anchor="ctr"/>
+          <a:lstStyle/>
+          <a:p>
+            <a:pPr algn="ctr"/>
+          </a:p>
+        </p:txBody>
+      </p:sp>
+      <p:sp>
+        <p:nvSpPr>
+          <p:cNvPr id="8" name="TextBox 7"/>
+          <p:cNvSpPr txBox="1"/>
+          <p:nvPr/>
+        </p:nvSpPr>
+        <p:spPr>
+          <a:xfrm>
+            <a:off x="320040" y="4892040"/>
+            <a:ext cx="8503920" cy="251460"/>
+          </a:xfrm>
+          <a:prstGeom prst="rect">
+            <a:avLst/>
+          </a:prstGeom>
+          <a:noFill/>
+        </p:spPr>
+        <p:txBody>
+          <a:bodyPr wrap="square">
+            <a:spAutoFit/>
+          </a:bodyPr>
+          <a:lstStyle/>
+          <a:p>
+            <a:pPr algn="l"/>
+            <a:r>
+              <a:rPr sz="800" b="0" i="0">
+                <a:solidFill>
+                  <a:srgbClr val="94A3B8"/>
+                </a:solidFill>
+              </a:rPr>
+              <a:t>RedTeamLoop  |  Automated LLM Safety Auditing</a:t>
+            </a:r>
+          </a:p>
+        </p:txBody>
+      </p:sp>
+      <p:sp>
+        <p:nvSpPr>
+          <p:cNvPr id="9" name="Rectangle 8"/>
+          <p:cNvSpPr/>
+          <p:nvPr/>
+        </p:nvSpPr>
+        <p:spPr>
+          <a:xfrm>
+            <a:off x="230000" y="1620000"/>
+            <a:ext cx="1580000" cy="1700000"/>
+          </a:xfrm>
+          <a:prstGeom prst="rect">
+            <a:avLst/>
+          </a:prstGeom>
+          <a:solidFill>
+            <a:srgbClr val="1E293B"/>
+          </a:solidFill>
+          <a:ln w="12700">
+            <a:solidFill>
+              <a:srgbClr val="00D4FF"/>
+            </a:solidFill>
+          </a:ln>
+        </p:spPr>
+        <p:style>
+          <a:lnRef idx="1">
+            <a:schemeClr val="accent1"/>
+          </a:lnRef>
+          <a:fillRef idx="3">
+            <a:schemeClr val="accent1"/>
+          </a:fillRef>
+          <a:effectRef idx="2">
+            <a:schemeClr val="accent1"/>
+          </a:effectRef>
+          <a:fontRef idx="minor">
+            <a:schemeClr val="lt1"/>
+          </a:fontRef>
+        </p:style>
+        <p:txBody>
+          <a:bodyPr rtlCol="0" anchor="ctr"/>
+          <a:lstStyle/>
+          <a:p>
+            <a:pPr algn="ctr"/>
+          </a:p>
+        </p:txBody>
+      </p:sp>
+      <p:sp>
+        <p:nvSpPr>
+          <p:cNvPr id="10" name="TextBox 9"/>
+          <p:cNvSpPr txBox="1"/>
+          <p:nvPr/>
+        </p:nvSpPr>
+        <p:spPr>
+          <a:xfrm>
+            <a:off x="270000" y="1680000"/>
+            <a:ext cx="1500000" cy="1600000"/>
+          </a:xfrm>
+          <a:prstGeom prst="rect">
+            <a:avLst/>
+          </a:prstGeom>
+          <a:noFill/>
+        </p:spPr>
+        <p:txBody>
+          <a:bodyPr wrap="square">
+            <a:spAutoFit/>
+          </a:bodyPr>
+          <a:lstStyle/>
+          <a:p>
+            <a:pPr algn="l"/>
+            <a:r>
+              <a:rPr sz="900" b="0" i="0">
+                <a:solidFill>
+                  <a:srgbClr val="E2E8F0"/>
+                </a:solidFill>
+              </a:rPr>
+              <a:t>Turn 1
+next_prompt(
+  turn=0
+  history=[]
+  score=0)</a:t>
+            </a:r>
+          </a:p>
+        </p:txBody>
+      </p:sp>
+      <p:sp>
+        <p:nvSpPr>
+          <p:cNvPr id="11" name="TextBox 10"/>
+          <p:cNvSpPr txBox="1"/>
+          <p:nvPr/>
+        </p:nvSpPr>
+        <p:spPr>
+          <a:xfrm>
+            <a:off x="1810000" y="2350000"/>
+            <a:ext cx="250000" cy="280000"/>
+          </a:xfrm>
+          <a:prstGeom prst="rect">
+            <a:avLst/>
+          </a:prstGeom>
+          <a:noFill/>
+        </p:spPr>
+        <p:txBody>
+          <a:bodyPr wrap="square">
+            <a:spAutoFit/>
+          </a:bodyPr>
+          <a:lstStyle/>
+          <a:p>
+            <a:pPr algn="ctr"/>
+            <a:r>
+              <a:rPr sz="1400" b="1" i="0">
+                <a:solidFill>
+                  <a:srgbClr val="94A3B8"/>
+                </a:solidFill>
+              </a:rPr>
+              <a:t>→</a:t>
+            </a:r>
+          </a:p>
+        </p:txBody>
+      </p:sp>
+      <p:sp>
+        <p:nvSpPr>
+          <p:cNvPr id="12" name="Rectangle 11"/>
+          <p:cNvSpPr/>
+          <p:nvPr/>
+        </p:nvSpPr>
+        <p:spPr>
+          <a:xfrm>
+            <a:off x="2060000" y="1620000"/>
+            <a:ext cx="1580000" cy="1700000"/>
+          </a:xfrm>
+          <a:prstGeom prst="rect">
+            <a:avLst/>
+          </a:prstGeom>
+          <a:solidFill>
+            <a:srgbClr val="1E293B"/>
+          </a:solidFill>
+          <a:ln w="12700">
+            <a:solidFill>
+              <a:srgbClr val="00D4FF"/>
+            </a:solidFill>
+          </a:ln>
+        </p:spPr>
+        <p:style>
+          <a:lnRef idx="1">
+            <a:schemeClr val="accent1"/>
+          </a:lnRef>
+          <a:fillRef idx="3">
+            <a:schemeClr val="accent1"/>
+          </a:fillRef>
+          <a:effectRef idx="2">
+            <a:schemeClr val="accent1"/>
+          </a:effectRef>
+          <a:fontRef idx="minor">
+            <a:schemeClr val="lt1"/>
+          </a:fontRef>
+        </p:style>
+        <p:txBody>
+          <a:bodyPr rtlCol="0" anchor="ctr"/>
+          <a:lstStyle/>
+          <a:p>
+            <a:pPr algn="ctr"/>
+          </a:p>
+        </p:txBody>
+      </p:sp>
+      <p:sp>
+        <p:nvSpPr>
+          <p:cNvPr id="13" name="TextBox 12"/>
+          <p:cNvSpPr txBox="1"/>
+          <p:nvPr/>
+        </p:nvSpPr>
+        <p:spPr>
+          <a:xfrm>
+            <a:off x="2100000" y="1680000"/>
+            <a:ext cx="1500000" cy="1600000"/>
+          </a:xfrm>
+          <a:prstGeom prst="rect">
+            <a:avLst/>
+          </a:prstGeom>
+          <a:noFill/>
+        </p:spPr>
+        <p:txBody>
+          <a:bodyPr wrap="square">
+            <a:spAutoFit/>
+          </a:bodyPr>
+          <a:lstStyle/>
+          <a:p>
+            <a:pPr algn="l"/>
+            <a:r>
+              <a:rPr sz="900" b="0" i="0">
+                <a:solidFill>
+                  <a:srgbClr val="E2E8F0"/>
+                </a:solidFill>
+              </a:rPr>
+              <a:t>Turn 2
+next_prompt(
+  turn=1
+  history=[t1]
+  score=prev)</a:t>
+            </a:r>
+          </a:p>
+        </p:txBody>
+      </p:sp>
+      <p:sp>
+        <p:nvSpPr>
+          <p:cNvPr id="14" name="TextBox 13"/>
+          <p:cNvSpPr txBox="1"/>
+          <p:nvPr/>
+        </p:nvSpPr>
+        <p:spPr>
+          <a:xfrm>
+            <a:off x="3640000" y="2350000"/>
+            <a:ext cx="250000" cy="280000"/>
+          </a:xfrm>
+          <a:prstGeom prst="rect">
+            <a:avLst/>
+          </a:prstGeom>
+          <a:noFill/>
+        </p:spPr>
+        <p:txBody>
+          <a:bodyPr wrap="square">
+            <a:spAutoFit/>
+          </a:bodyPr>
+          <a:lstStyle/>
+          <a:p>
+            <a:pPr algn="ctr"/>
+            <a:r>
+              <a:rPr sz="1400" b="1" i="0">
+                <a:solidFill>
+                  <a:srgbClr val="94A3B8"/>
+                </a:solidFill>
+              </a:rPr>
+              <a:t>→ … →</a:t>
+            </a:r>
+          </a:p>
+        </p:txBody>
+      </p:sp>
+      <p:sp>
+        <p:nvSpPr>
+          <p:cNvPr id="15" name="Rectangle 14"/>
+          <p:cNvSpPr/>
+          <p:nvPr/>
+        </p:nvSpPr>
+        <p:spPr>
+          <a:xfrm>
+            <a:off x="3890000" y="1620000"/>
+            <a:ext cx="1580000" cy="1700000"/>
+          </a:xfrm>
+          <a:prstGeom prst="rect">
+            <a:avLst/>
+          </a:prstGeom>
+          <a:solidFill>
+            <a:srgbClr val="1E293B"/>
+          </a:solidFill>
+          <a:ln w="12700">
+            <a:solidFill>
+              <a:srgbClr val="00D4FF"/>
+            </a:solidFill>
+          </a:ln>
+        </p:spPr>
+        <p:style>
+          <a:lnRef idx="1">
+            <a:schemeClr val="accent1"/>
+          </a:lnRef>
+          <a:fillRef idx="3">
+            <a:schemeClr val="accent1"/>
+          </a:fillRef>
+          <a:effectRef idx="2">
+            <a:schemeClr val="accent1"/>
+          </a:effectRef>
+          <a:fontRef idx="minor">
+            <a:schemeClr val="lt1"/>
+          </a:fontRef>
+        </p:style>
+        <p:txBody>
+          <a:bodyPr rtlCol="0" anchor="ctr"/>
+          <a:lstStyle/>
+          <a:p>
+            <a:pPr algn="ctr"/>
+          </a:p>
+        </p:txBody>
+      </p:sp>
+      <p:sp>
+        <p:nvSpPr>
+          <p:cNvPr id="16" name="TextBox 15"/>
+          <p:cNvSpPr txBox="1"/>
+          <p:nvPr/>
+        </p:nvSpPr>
+        <p:spPr>
+          <a:xfrm>
+            <a:off x="3930000" y="1680000"/>
+            <a:ext cx="1500000" cy="1600000"/>
+          </a:xfrm>
+          <a:prstGeom prst="rect">
+            <a:avLst/>
+          </a:prstGeom>
+          <a:noFill/>
+        </p:spPr>
+        <p:txBody>
+          <a:bodyPr wrap="square">
+            <a:spAutoFit/>
+          </a:bodyPr>
+          <a:lstStyle/>
+          <a:p>
+            <a:pPr algn="l"/>
+            <a:r>
+              <a:rPr sz="900" b="0" i="0">
+                <a:solidFill>
+                  <a:srgbClr val="E2E8F0"/>
+                </a:solidFill>
+              </a:rPr>
+              <a:t>Turn N
+next_prompt(
+  turn=N-1
+  history=[…]
+  score=prev)</a:t>
+            </a:r>
+          </a:p>
+        </p:txBody>
+      </p:sp>
+      <p:sp>
+        <p:nvSpPr>
+          <p:cNvPr id="17" name="TextBox 16"/>
+          <p:cNvSpPr txBox="1"/>
+          <p:nvPr/>
+        </p:nvSpPr>
+        <p:spPr>
+          <a:xfrm>
+            <a:off x="230000" y="3430000"/>
+            <a:ext cx="8684000" cy="240000"/>
+          </a:xfrm>
+          <a:prstGeom prst="rect">
+            <a:avLst/>
+          </a:prstGeom>
+          <a:noFill/>
+        </p:spPr>
+        <p:txBody>
+          <a:bodyPr wrap="square">
+            <a:spAutoFit/>
+          </a:bodyPr>
+          <a:lstStyle/>
+          <a:p>
+            <a:pPr algn="l"/>
+            <a:r>
+              <a:rPr sz="1000" b="1" i="0">
+                <a:solidFill>
+                  <a:srgbClr val="F59E0B"/>
+                </a:solidFill>
+              </a:rPr>
+              <a:t>→ score ≥ threshold: break early  →  EpisodeResult</a:t>
+            </a:r>
+          </a:p>
+        </p:txBody>
+      </p:sp>
+      <p:sp>
+        <p:nvSpPr>
+          <p:cNvPr id="18" name="Rectangle 17"/>
+          <p:cNvSpPr/>
+          <p:nvPr/>
+        </p:nvSpPr>
+        <p:spPr>
+          <a:xfrm>
+            <a:off x="230000" y="3750000"/>
+            <a:ext cx="8684000" cy="660000"/>
+          </a:xfrm>
+          <a:prstGeom prst="rect">
+            <a:avLst/>
+          </a:prstGeom>
+          <a:solidFill>
+            <a:srgbClr val="1E293B"/>
+          </a:solidFill>
+          <a:ln w="12700">
+            <a:solidFill>
+              <a:srgbClr val="F59E0B"/>
+            </a:solidFill>
+          </a:ln>
+        </p:spPr>
+        <p:style>
+          <a:lnRef idx="1">
+            <a:schemeClr val="accent1"/>
+          </a:lnRef>
+          <a:fillRef idx="3">
+            <a:schemeClr val="accent1"/>
+          </a:fillRef>
+          <a:effectRef idx="2">
+            <a:schemeClr val="accent1"/>
+          </a:effectRef>
+          <a:fontRef idx="minor">
+            <a:schemeClr val="lt1"/>
+          </a:fontRef>
+        </p:style>
+        <p:txBody>
+          <a:bodyPr rtlCol="0" anchor="ctr"/>
+          <a:lstStyle/>
+          <a:p>
+            <a:pPr algn="ctr"/>
+          </a:p>
+        </p:txBody>
+      </p:sp>
+      <p:sp>
+        <p:nvSpPr>
+          <p:cNvPr id="19" name="TextBox 18"/>
+          <p:cNvSpPr txBox="1"/>
+          <p:nvPr/>
+        </p:nvSpPr>
+        <p:spPr>
+          <a:xfrm>
+            <a:off x="290000" y="3810000"/>
+            <a:ext cx="8564000" cy="560000"/>
+          </a:xfrm>
+          <a:prstGeom prst="rect">
+            <a:avLst/>
+          </a:prstGeom>
+          <a:noFill/>
+        </p:spPr>
+        <p:txBody>
+          <a:bodyPr wrap="square">
+            <a:spAutoFit/>
+          </a:bodyPr>
+          <a:lstStyle/>
+          <a:p>
+            <a:pPr algn="l"/>
+            <a:r>
+              <a:rPr sz="900" b="0" i="0">
+                <a:solidFill>
+                  <a:srgbClr val="E2E8F0"/>
+                </a:solidFill>
+              </a:rPr>
+              <a:t>Crescendo difference:
+  • Script pre-generated per episode before turn 1 starts.
+  • Static: loads turn list from JSONL  (crescendo_script_file in config.yaml)
+  • Dynamic: attacker LLM calls generate_script(objective, max_turns) upfront then serves pre-built prompts turn-by-turn (no live LLM calls during the loop).</a:t>
+            </a:r>
+          </a:p>
+        </p:txBody>
+      </p:sp>
+    </p:spTree>
+  </p:cSld>
+  <p:clrMapOvr>
+    <a:masterClrMapping/>
+  </p:clrMapOvr>
+</p:sld>
+</file>
+
 <file path=ppt/slides/slide2.xml><?xml version="1.0" encoding="utf-8"?>
 <p:sld xmlns:a="http://schemas.openxmlformats.org/drawingml/2006/main" xmlns:r="http://schemas.openxmlformats.org/officeDocument/2006/relationships" xmlns:p="http://schemas.openxmlformats.org/presentationml/2006/main">
   <p:cSld name="Slide 2">
@@ -12284,6 +15301,821 @@
               <a:t>Pre-deployment auditing: financial advice bypasses, PII leakage, regulatory violations, prompt injection.</a:t>
             </a:r>
             <a:endParaRPr lang="en-US" sz="1050" dirty="0"/>
+          </a:p>
+        </p:txBody>
+      </p:sp>
+    </p:spTree>
+  </p:cSld>
+  <p:clrMapOvr>
+    <a:masterClrMapping/>
+  </p:clrMapOvr>
+</p:sld>
+</file>
+
+<file path=ppt/slides/slide20.xml><?xml version="1.0" encoding="utf-8"?>
+<p:sld xmlns:a="http://schemas.openxmlformats.org/drawingml/2006/main" xmlns:p="http://schemas.openxmlformats.org/presentationml/2006/main" xmlns:r="http://schemas.openxmlformats.org/officeDocument/2006/relationships">
+  <p:cSld>
+    <p:spTree>
+      <p:nvGrpSpPr>
+        <p:cNvPr id="1" name=""/>
+        <p:cNvGrpSpPr/>
+        <p:nvPr/>
+      </p:nvGrpSpPr>
+      <p:grpSpPr/>
+      <p:sp>
+        <p:nvSpPr>
+          <p:cNvPr id="2" name="Rectangle 1"/>
+          <p:cNvSpPr/>
+          <p:nvPr/>
+        </p:nvSpPr>
+        <p:spPr>
+          <a:xfrm>
+            <a:off x="0" y="0"/>
+            <a:ext cx="9144000" cy="54864"/>
+          </a:xfrm>
+          <a:prstGeom prst="rect">
+            <a:avLst/>
+          </a:prstGeom>
+          <a:solidFill>
+            <a:srgbClr val="00D4FF"/>
+          </a:solidFill>
+          <a:ln>
+            <a:noFill/>
+          </a:ln>
+        </p:spPr>
+        <p:style>
+          <a:lnRef idx="1">
+            <a:schemeClr val="accent1"/>
+          </a:lnRef>
+          <a:fillRef idx="3">
+            <a:schemeClr val="accent1"/>
+          </a:fillRef>
+          <a:effectRef idx="2">
+            <a:schemeClr val="accent1"/>
+          </a:effectRef>
+          <a:fontRef idx="minor">
+            <a:schemeClr val="lt1"/>
+          </a:fontRef>
+        </p:style>
+        <p:txBody>
+          <a:bodyPr rtlCol="0" anchor="ctr"/>
+          <a:lstStyle/>
+          <a:p>
+            <a:pPr algn="ctr"/>
+          </a:p>
+        </p:txBody>
+      </p:sp>
+      <p:sp>
+        <p:nvSpPr>
+          <p:cNvPr id="3" name="TextBox 2"/>
+          <p:cNvSpPr txBox="1"/>
+          <p:nvPr/>
+        </p:nvSpPr>
+        <p:spPr>
+          <a:xfrm>
+            <a:off x="320040" y="109728"/>
+            <a:ext cx="8503920" cy="274320"/>
+          </a:xfrm>
+          <a:prstGeom prst="rect">
+            <a:avLst/>
+          </a:prstGeom>
+          <a:noFill/>
+        </p:spPr>
+        <p:txBody>
+          <a:bodyPr wrap="square">
+            <a:spAutoFit/>
+          </a:bodyPr>
+          <a:lstStyle/>
+          <a:p>
+            <a:pPr algn="l"/>
+            <a:r>
+              <a:rPr sz="900" b="1" i="0">
+                <a:solidFill>
+                  <a:srgbClr val="00D4FF"/>
+                </a:solidFill>
+              </a:rPr>
+              <a:t>MULTI-TURN &gt; MCTS</a:t>
+            </a:r>
+          </a:p>
+        </p:txBody>
+      </p:sp>
+      <p:sp>
+        <p:nvSpPr>
+          <p:cNvPr id="4" name="TextBox 3"/>
+          <p:cNvSpPr txBox="1"/>
+          <p:nvPr/>
+        </p:nvSpPr>
+        <p:spPr>
+          <a:xfrm>
+            <a:off x="320040" y="475488"/>
+            <a:ext cx="8503920" cy="594360"/>
+          </a:xfrm>
+          <a:prstGeom prst="rect">
+            <a:avLst/>
+          </a:prstGeom>
+          <a:noFill/>
+        </p:spPr>
+        <p:txBody>
+          <a:bodyPr wrap="square">
+            <a:spAutoFit/>
+          </a:bodyPr>
+          <a:lstStyle/>
+          <a:p>
+            <a:pPr algn="l"/>
+            <a:r>
+              <a:rPr sz="2800" b="1" i="0">
+                <a:solidFill>
+                  <a:srgbClr val="FFFFFF"/>
+                </a:solidFill>
+              </a:rPr>
+              <a:t>Monte Carlo Tree Search</a:t>
+            </a:r>
+          </a:p>
+        </p:txBody>
+      </p:sp>
+      <p:sp>
+        <p:nvSpPr>
+          <p:cNvPr id="5" name="TextBox 4"/>
+          <p:cNvSpPr txBox="1"/>
+          <p:nvPr/>
+        </p:nvSpPr>
+        <p:spPr>
+          <a:xfrm>
+            <a:off x="320040" y="1051560"/>
+            <a:ext cx="8503920" cy="274320"/>
+          </a:xfrm>
+          <a:prstGeom prst="rect">
+            <a:avLst/>
+          </a:prstGeom>
+          <a:noFill/>
+        </p:spPr>
+        <p:txBody>
+          <a:bodyPr wrap="square">
+            <a:spAutoFit/>
+          </a:bodyPr>
+          <a:lstStyle/>
+          <a:p>
+            <a:pPr algn="l"/>
+            <a:r>
+              <a:rPr sz="1200" b="0" i="0">
+                <a:solidFill>
+                  <a:srgbClr val="94A3B8"/>
+                </a:solidFill>
+              </a:rPr>
+              <a:t>Explores branching conversation trees to find the highest-scoring attack path</a:t>
+            </a:r>
+          </a:p>
+        </p:txBody>
+      </p:sp>
+      <p:sp>
+        <p:nvSpPr>
+          <p:cNvPr id="6" name="Rectangle 5"/>
+          <p:cNvSpPr/>
+          <p:nvPr/>
+        </p:nvSpPr>
+        <p:spPr>
+          <a:xfrm>
+            <a:off x="320040" y="1389888"/>
+            <a:ext cx="8503920" cy="13716"/>
+          </a:xfrm>
+          <a:prstGeom prst="rect">
+            <a:avLst/>
+          </a:prstGeom>
+          <a:solidFill>
+            <a:srgbClr val="00D4FF"/>
+          </a:solidFill>
+          <a:ln>
+            <a:noFill/>
+          </a:ln>
+        </p:spPr>
+        <p:style>
+          <a:lnRef idx="1">
+            <a:schemeClr val="accent1"/>
+          </a:lnRef>
+          <a:fillRef idx="3">
+            <a:schemeClr val="accent1"/>
+          </a:fillRef>
+          <a:effectRef idx="2">
+            <a:schemeClr val="accent1"/>
+          </a:effectRef>
+          <a:fontRef idx="minor">
+            <a:schemeClr val="lt1"/>
+          </a:fontRef>
+        </p:style>
+        <p:txBody>
+          <a:bodyPr rtlCol="0" anchor="ctr"/>
+          <a:lstStyle/>
+          <a:p>
+            <a:pPr algn="ctr"/>
+          </a:p>
+        </p:txBody>
+      </p:sp>
+      <p:sp>
+        <p:nvSpPr>
+          <p:cNvPr id="7" name="Rectangle 6"/>
+          <p:cNvSpPr/>
+          <p:nvPr/>
+        </p:nvSpPr>
+        <p:spPr>
+          <a:xfrm>
+            <a:off x="0" y="4892040"/>
+            <a:ext cx="9144000" cy="251460"/>
+          </a:xfrm>
+          <a:prstGeom prst="rect">
+            <a:avLst/>
+          </a:prstGeom>
+          <a:solidFill>
+            <a:srgbClr val="0F172A"/>
+          </a:solidFill>
+          <a:ln>
+            <a:noFill/>
+          </a:ln>
+        </p:spPr>
+        <p:style>
+          <a:lnRef idx="1">
+            <a:schemeClr val="accent1"/>
+          </a:lnRef>
+          <a:fillRef idx="3">
+            <a:schemeClr val="accent1"/>
+          </a:fillRef>
+          <a:effectRef idx="2">
+            <a:schemeClr val="accent1"/>
+          </a:effectRef>
+          <a:fontRef idx="minor">
+            <a:schemeClr val="lt1"/>
+          </a:fontRef>
+        </p:style>
+        <p:txBody>
+          <a:bodyPr rtlCol="0" anchor="ctr"/>
+          <a:lstStyle/>
+          <a:p>
+            <a:pPr algn="ctr"/>
+          </a:p>
+        </p:txBody>
+      </p:sp>
+      <p:sp>
+        <p:nvSpPr>
+          <p:cNvPr id="8" name="TextBox 7"/>
+          <p:cNvSpPr txBox="1"/>
+          <p:nvPr/>
+        </p:nvSpPr>
+        <p:spPr>
+          <a:xfrm>
+            <a:off x="320040" y="4892040"/>
+            <a:ext cx="8503920" cy="251460"/>
+          </a:xfrm>
+          <a:prstGeom prst="rect">
+            <a:avLst/>
+          </a:prstGeom>
+          <a:noFill/>
+        </p:spPr>
+        <p:txBody>
+          <a:bodyPr wrap="square">
+            <a:spAutoFit/>
+          </a:bodyPr>
+          <a:lstStyle/>
+          <a:p>
+            <a:pPr algn="l"/>
+            <a:r>
+              <a:rPr sz="800" b="0" i="0">
+                <a:solidFill>
+                  <a:srgbClr val="94A3B8"/>
+                </a:solidFill>
+              </a:rPr>
+              <a:t>RedTeamLoop  |  Automated LLM Safety Auditing</a:t>
+            </a:r>
+          </a:p>
+        </p:txBody>
+      </p:sp>
+      <p:sp>
+        <p:nvSpPr>
+          <p:cNvPr id="9" name="Rectangle 8"/>
+          <p:cNvSpPr/>
+          <p:nvPr/>
+        </p:nvSpPr>
+        <p:spPr>
+          <a:xfrm>
+            <a:off x="200000" y="1560000"/>
+            <a:ext cx="4000000" cy="1400000"/>
+          </a:xfrm>
+          <a:prstGeom prst="rect">
+            <a:avLst/>
+          </a:prstGeom>
+          <a:solidFill>
+            <a:srgbClr val="1E293B"/>
+          </a:solidFill>
+          <a:ln w="12700">
+            <a:solidFill>
+              <a:srgbClr val="00D4FF"/>
+            </a:solidFill>
+          </a:ln>
+        </p:spPr>
+        <p:style>
+          <a:lnRef idx="1">
+            <a:schemeClr val="accent1"/>
+          </a:lnRef>
+          <a:fillRef idx="3">
+            <a:schemeClr val="accent1"/>
+          </a:fillRef>
+          <a:effectRef idx="2">
+            <a:schemeClr val="accent1"/>
+          </a:effectRef>
+          <a:fontRef idx="minor">
+            <a:schemeClr val="lt1"/>
+          </a:fontRef>
+        </p:style>
+        <p:txBody>
+          <a:bodyPr rtlCol="0" anchor="ctr"/>
+          <a:lstStyle/>
+          <a:p>
+            <a:pPr algn="ctr"/>
+          </a:p>
+        </p:txBody>
+      </p:sp>
+      <p:sp>
+        <p:nvSpPr>
+          <p:cNvPr id="10" name="TextBox 9"/>
+          <p:cNvSpPr txBox="1"/>
+          <p:nvPr/>
+        </p:nvSpPr>
+        <p:spPr>
+          <a:xfrm>
+            <a:off x="260000" y="1615000"/>
+            <a:ext cx="3880000" cy="240000"/>
+          </a:xfrm>
+          <a:prstGeom prst="rect">
+            <a:avLst/>
+          </a:prstGeom>
+          <a:noFill/>
+        </p:spPr>
+        <p:txBody>
+          <a:bodyPr wrap="square">
+            <a:spAutoFit/>
+          </a:bodyPr>
+          <a:lstStyle/>
+          <a:p>
+            <a:pPr algn="l"/>
+            <a:r>
+              <a:rPr sz="1100" b="1" i="0">
+                <a:solidFill>
+                  <a:srgbClr val="00D4FF"/>
+                </a:solidFill>
+              </a:rPr>
+              <a:t>① SELECT</a:t>
+            </a:r>
+          </a:p>
+        </p:txBody>
+      </p:sp>
+      <p:sp>
+        <p:nvSpPr>
+          <p:cNvPr id="11" name="TextBox 10"/>
+          <p:cNvSpPr txBox="1"/>
+          <p:nvPr/>
+        </p:nvSpPr>
+        <p:spPr>
+          <a:xfrm>
+            <a:off x="260000" y="1870000"/>
+            <a:ext cx="3880000" cy="1020000"/>
+          </a:xfrm>
+          <a:prstGeom prst="rect">
+            <a:avLst/>
+          </a:prstGeom>
+          <a:noFill/>
+        </p:spPr>
+        <p:txBody>
+          <a:bodyPr wrap="square">
+            <a:spAutoFit/>
+          </a:bodyPr>
+          <a:lstStyle/>
+          <a:p>
+            <a:pPr algn="l"/>
+            <a:r>
+              <a:rPr sz="850" b="0" i="0">
+                <a:solidFill>
+                  <a:srgbClr val="E2E8F0"/>
+                </a:solidFill>
+              </a:rPr>
+              <a:t>Walk tree from root.
+Choose child with max UCT score:
+UCT = value/visits + C × √(ln(parent_visits)/visits)
+Unvisited nodes → UCT = ∞  (always explored first)</a:t>
+            </a:r>
+          </a:p>
+        </p:txBody>
+      </p:sp>
+      <p:sp>
+        <p:nvSpPr>
+          <p:cNvPr id="12" name="Rectangle 11"/>
+          <p:cNvSpPr/>
+          <p:nvPr/>
+        </p:nvSpPr>
+        <p:spPr>
+          <a:xfrm>
+            <a:off x="4440000" y="1560000"/>
+            <a:ext cx="4000000" cy="1400000"/>
+          </a:xfrm>
+          <a:prstGeom prst="rect">
+            <a:avLst/>
+          </a:prstGeom>
+          <a:solidFill>
+            <a:srgbClr val="1E293B"/>
+          </a:solidFill>
+          <a:ln w="12700">
+            <a:solidFill>
+              <a:srgbClr val="22C55E"/>
+            </a:solidFill>
+          </a:ln>
+        </p:spPr>
+        <p:style>
+          <a:lnRef idx="1">
+            <a:schemeClr val="accent1"/>
+          </a:lnRef>
+          <a:fillRef idx="3">
+            <a:schemeClr val="accent1"/>
+          </a:fillRef>
+          <a:effectRef idx="2">
+            <a:schemeClr val="accent1"/>
+          </a:effectRef>
+          <a:fontRef idx="minor">
+            <a:schemeClr val="lt1"/>
+          </a:fontRef>
+        </p:style>
+        <p:txBody>
+          <a:bodyPr rtlCol="0" anchor="ctr"/>
+          <a:lstStyle/>
+          <a:p>
+            <a:pPr algn="ctr"/>
+          </a:p>
+        </p:txBody>
+      </p:sp>
+      <p:sp>
+        <p:nvSpPr>
+          <p:cNvPr id="13" name="TextBox 12"/>
+          <p:cNvSpPr txBox="1"/>
+          <p:nvPr/>
+        </p:nvSpPr>
+        <p:spPr>
+          <a:xfrm>
+            <a:off x="4500000" y="1615000"/>
+            <a:ext cx="3880000" cy="240000"/>
+          </a:xfrm>
+          <a:prstGeom prst="rect">
+            <a:avLst/>
+          </a:prstGeom>
+          <a:noFill/>
+        </p:spPr>
+        <p:txBody>
+          <a:bodyPr wrap="square">
+            <a:spAutoFit/>
+          </a:bodyPr>
+          <a:lstStyle/>
+          <a:p>
+            <a:pPr algn="l"/>
+            <a:r>
+              <a:rPr sz="1100" b="1" i="0">
+                <a:solidFill>
+                  <a:srgbClr val="22C55E"/>
+                </a:solidFill>
+              </a:rPr>
+              <a:t>② EXPAND</a:t>
+            </a:r>
+          </a:p>
+        </p:txBody>
+      </p:sp>
+      <p:sp>
+        <p:nvSpPr>
+          <p:cNvPr id="14" name="TextBox 13"/>
+          <p:cNvSpPr txBox="1"/>
+          <p:nvPr/>
+        </p:nvSpPr>
+        <p:spPr>
+          <a:xfrm>
+            <a:off x="4500000" y="1870000"/>
+            <a:ext cx="3880000" cy="1020000"/>
+          </a:xfrm>
+          <a:prstGeom prst="rect">
+            <a:avLst/>
+          </a:prstGeom>
+          <a:noFill/>
+        </p:spPr>
+        <p:txBody>
+          <a:bodyPr wrap="square">
+            <a:spAutoFit/>
+          </a:bodyPr>
+          <a:lstStyle/>
+          <a:p>
+            <a:pPr algn="l"/>
+            <a:r>
+              <a:rPr sz="850" b="0" i="0">
+                <a:solidFill>
+                  <a:srgbClr val="E2E8F0"/>
+                </a:solidFill>
+              </a:rPr>
+              <a:t>At selected leaf: generate k prompts (branching_factor).
+Call target + judge for each candidate.
+Create MCTSNode children with (score, depth, history).
+Append AttackRecord to all_records.</a:t>
+            </a:r>
+          </a:p>
+        </p:txBody>
+      </p:sp>
+      <p:sp>
+        <p:nvSpPr>
+          <p:cNvPr id="15" name="Rectangle 14"/>
+          <p:cNvSpPr/>
+          <p:nvPr/>
+        </p:nvSpPr>
+        <p:spPr>
+          <a:xfrm>
+            <a:off x="200000" y="3060000"/>
+            <a:ext cx="4000000" cy="1400000"/>
+          </a:xfrm>
+          <a:prstGeom prst="rect">
+            <a:avLst/>
+          </a:prstGeom>
+          <a:solidFill>
+            <a:srgbClr val="1E293B"/>
+          </a:solidFill>
+          <a:ln w="12700">
+            <a:solidFill>
+              <a:srgbClr val="F59E0B"/>
+            </a:solidFill>
+          </a:ln>
+        </p:spPr>
+        <p:style>
+          <a:lnRef idx="1">
+            <a:schemeClr val="accent1"/>
+          </a:lnRef>
+          <a:fillRef idx="3">
+            <a:schemeClr val="accent1"/>
+          </a:fillRef>
+          <a:effectRef idx="2">
+            <a:schemeClr val="accent1"/>
+          </a:effectRef>
+          <a:fontRef idx="minor">
+            <a:schemeClr val="lt1"/>
+          </a:fontRef>
+        </p:style>
+        <p:txBody>
+          <a:bodyPr rtlCol="0" anchor="ctr"/>
+          <a:lstStyle/>
+          <a:p>
+            <a:pPr algn="ctr"/>
+          </a:p>
+        </p:txBody>
+      </p:sp>
+      <p:sp>
+        <p:nvSpPr>
+          <p:cNvPr id="16" name="TextBox 15"/>
+          <p:cNvSpPr txBox="1"/>
+          <p:nvPr/>
+        </p:nvSpPr>
+        <p:spPr>
+          <a:xfrm>
+            <a:off x="260000" y="3115000"/>
+            <a:ext cx="3880000" cy="240000"/>
+          </a:xfrm>
+          <a:prstGeom prst="rect">
+            <a:avLst/>
+          </a:prstGeom>
+          <a:noFill/>
+        </p:spPr>
+        <p:txBody>
+          <a:bodyPr wrap="square">
+            <a:spAutoFit/>
+          </a:bodyPr>
+          <a:lstStyle/>
+          <a:p>
+            <a:pPr algn="l"/>
+            <a:r>
+              <a:rPr sz="1100" b="1" i="0">
+                <a:solidFill>
+                  <a:srgbClr val="F59E0B"/>
+                </a:solidFill>
+              </a:rPr>
+              <a:t>③ SIMULATE  (rollout)</a:t>
+            </a:r>
+          </a:p>
+        </p:txBody>
+      </p:sp>
+      <p:sp>
+        <p:nvSpPr>
+          <p:cNvPr id="17" name="TextBox 16"/>
+          <p:cNvSpPr txBox="1"/>
+          <p:nvPr/>
+        </p:nvSpPr>
+        <p:spPr>
+          <a:xfrm>
+            <a:off x="260000" y="3370000"/>
+            <a:ext cx="3880000" cy="1020000"/>
+          </a:xfrm>
+          <a:prstGeom prst="rect">
+            <a:avLst/>
+          </a:prstGeom>
+          <a:noFill/>
+        </p:spPr>
+        <p:txBody>
+          <a:bodyPr wrap="square">
+            <a:spAutoFit/>
+          </a:bodyPr>
+          <a:lstStyle/>
+          <a:p>
+            <a:pPr algn="l"/>
+            <a:r>
+              <a:rPr sz="850" b="0" i="0">
+                <a:solidFill>
+                  <a:srgbClr val="E2E8F0"/>
+                </a:solidFill>
+              </a:rPr>
+              <a:t>From first child run rollout_depth turns (no new nodes).
+Early exit if score ≥ threshold.
+Returns best_score / 10  →  UCT value estimate.
+Rollout results NOT added to tree or records.</a:t>
+            </a:r>
+          </a:p>
+        </p:txBody>
+      </p:sp>
+      <p:sp>
+        <p:nvSpPr>
+          <p:cNvPr id="18" name="Rectangle 17"/>
+          <p:cNvSpPr/>
+          <p:nvPr/>
+        </p:nvSpPr>
+        <p:spPr>
+          <a:xfrm>
+            <a:off x="4440000" y="3060000"/>
+            <a:ext cx="4000000" cy="1400000"/>
+          </a:xfrm>
+          <a:prstGeom prst="rect">
+            <a:avLst/>
+          </a:prstGeom>
+          <a:solidFill>
+            <a:srgbClr val="1E293B"/>
+          </a:solidFill>
+          <a:ln w="12700">
+            <a:solidFill>
+              <a:srgbClr val="A855F7"/>
+            </a:solidFill>
+          </a:ln>
+        </p:spPr>
+        <p:style>
+          <a:lnRef idx="1">
+            <a:schemeClr val="accent1"/>
+          </a:lnRef>
+          <a:fillRef idx="3">
+            <a:schemeClr val="accent1"/>
+          </a:fillRef>
+          <a:effectRef idx="2">
+            <a:schemeClr val="accent1"/>
+          </a:effectRef>
+          <a:fontRef idx="minor">
+            <a:schemeClr val="lt1"/>
+          </a:fontRef>
+        </p:style>
+        <p:txBody>
+          <a:bodyPr rtlCol="0" anchor="ctr"/>
+          <a:lstStyle/>
+          <a:p>
+            <a:pPr algn="ctr"/>
+          </a:p>
+        </p:txBody>
+      </p:sp>
+      <p:sp>
+        <p:nvSpPr>
+          <p:cNvPr id="19" name="TextBox 18"/>
+          <p:cNvSpPr txBox="1"/>
+          <p:nvPr/>
+        </p:nvSpPr>
+        <p:spPr>
+          <a:xfrm>
+            <a:off x="4500000" y="3115000"/>
+            <a:ext cx="3880000" cy="240000"/>
+          </a:xfrm>
+          <a:prstGeom prst="rect">
+            <a:avLst/>
+          </a:prstGeom>
+          <a:noFill/>
+        </p:spPr>
+        <p:txBody>
+          <a:bodyPr wrap="square">
+            <a:spAutoFit/>
+          </a:bodyPr>
+          <a:lstStyle/>
+          <a:p>
+            <a:pPr algn="l"/>
+            <a:r>
+              <a:rPr sz="1100" b="1" i="0">
+                <a:solidFill>
+                  <a:srgbClr val="A855F7"/>
+                </a:solidFill>
+              </a:rPr>
+              <a:t>④ BACKPROP</a:t>
+            </a:r>
+          </a:p>
+        </p:txBody>
+      </p:sp>
+      <p:sp>
+        <p:nvSpPr>
+          <p:cNvPr id="20" name="TextBox 19"/>
+          <p:cNvSpPr txBox="1"/>
+          <p:nvPr/>
+        </p:nvSpPr>
+        <p:spPr>
+          <a:xfrm>
+            <a:off x="4500000" y="3370000"/>
+            <a:ext cx="3880000" cy="1020000"/>
+          </a:xfrm>
+          <a:prstGeom prst="rect">
+            <a:avLst/>
+          </a:prstGeom>
+          <a:noFill/>
+        </p:spPr>
+        <p:txBody>
+          <a:bodyPr wrap="square">
+            <a:spAutoFit/>
+          </a:bodyPr>
+          <a:lstStyle/>
+          <a:p>
+            <a:pPr algn="l"/>
+            <a:r>
+              <a:rPr sz="850" b="0" i="0">
+                <a:solidFill>
+                  <a:srgbClr val="E2E8F0"/>
+                </a:solidFill>
+              </a:rPr>
+              <a:t>Walk from expanded node back to root.
+Increment visits + total_value at every ancestor.
+High-value paths accumulate higher UCT exploitation term.
+Guides SELECT toward promising branches in later sims.</a:t>
+            </a:r>
+          </a:p>
+        </p:txBody>
+      </p:sp>
+      <p:sp>
+        <p:nvSpPr>
+          <p:cNvPr id="21" name="TextBox 20"/>
+          <p:cNvSpPr txBox="1"/>
+          <p:nvPr/>
+        </p:nvSpPr>
+        <p:spPr>
+          <a:xfrm>
+            <a:off x="200000" y="4460000"/>
+            <a:ext cx="8744000" cy="230000"/>
+          </a:xfrm>
+          <a:prstGeom prst="rect">
+            <a:avLst/>
+          </a:prstGeom>
+          <a:noFill/>
+        </p:spPr>
+        <p:txBody>
+          <a:bodyPr wrap="square">
+            <a:spAutoFit/>
+          </a:bodyPr>
+          <a:lstStyle/>
+          <a:p>
+            <a:pPr algn="ctr"/>
+            <a:r>
+              <a:rPr sz="1000" b="1" i="0">
+                <a:solidFill>
+                  <a:srgbClr val="22C55E"/>
+                </a:solidFill>
+              </a:rPr>
+              <a:t>↺  repeat for N simulations (default 20)</a:t>
+            </a:r>
+          </a:p>
+        </p:txBody>
+      </p:sp>
+      <p:sp>
+        <p:nvSpPr>
+          <p:cNvPr id="22" name="TextBox 21"/>
+          <p:cNvSpPr txBox="1"/>
+          <p:nvPr/>
+        </p:nvSpPr>
+        <p:spPr>
+          <a:xfrm>
+            <a:off x="200000" y="4700000"/>
+            <a:ext cx="8744000" cy="240000"/>
+          </a:xfrm>
+          <a:prstGeom prst="rect">
+            <a:avLst/>
+          </a:prstGeom>
+          <a:noFill/>
+        </p:spPr>
+        <p:txBody>
+          <a:bodyPr wrap="square">
+            <a:spAutoFit/>
+          </a:bodyPr>
+          <a:lstStyle/>
+          <a:p>
+            <a:pPr algn="ctr"/>
+            <a:r>
+              <a:rPr sz="900" b="0" i="0">
+                <a:solidFill>
+                  <a:srgbClr val="94A3B8"/>
+                </a:solidFill>
+              </a:rPr>
+              <a:t>_best_leaf(root): DFS over all nodes → pick highest observed score (depth &gt; 0). Returned as the best conversation_history in EpisodeResult.</a:t>
+            </a:r>
           </a:p>
         </p:txBody>
       </p:sp>
@@ -12510,7 +16342,7 @@
                 <a:ea typeface="Calibri" pitchFamily="34" charset="-122"/>
                 <a:cs typeface="Calibri" pitchFamily="34" charset="-120"/>
               </a:rPr>
-              <a:t>Agent loop execution path</a:t>
+              <a:t>Plain async while-loop — no framework dependency</a:t>
             </a:r>
             <a:endParaRPr lang="en-US" sz="1200" dirty="0"/>
           </a:p>
@@ -18752,7 +22584,7 @@
                 <a:ea typeface="Calibri" pitchFamily="34" charset="-122"/>
                 <a:cs typeface="Calibri" pitchFamily="34" charset="-120"/>
               </a:rPr>
-              <a:t>Writes successful attacks (score &gt;= 7.0) to JSONL + ChromaDB. Cosine similarity deduplication threshold: 0.92.</a:t>
+              <a:t>Writes successful attacks (score &gt;= 7.0) to JSONL + ChromaDB. SQLite dedup by session_id + iteration + strategy.</a:t>
             </a:r>
             <a:endParaRPr lang="en-US" sz="950" dirty="0"/>
           </a:p>
